--- a/cover-proposals/v14_1007_case3_final_ja/台割案3_確定_P02-11_編集用.pptx
+++ b/cover-proposals/v14_1007_case3_final_ja/台割案3_確定_P02-11_編集用.pptx
@@ -4047,7 +4047,7 @@
         </p:nvSpPr>
         <p:spPr>
           <a:xfrm>
-            <a:off x="4319887" y="76233"/>
+            <a:off x="5539620" y="76233"/>
             <a:ext cx="1737345" cy="1423022"/>
           </a:xfrm>
           <a:prstGeom prst="rect">

--- a/cover-proposals/v14_1007_case3_final_ja/台割案3_確定_P02-11_編集用.pptx
+++ b/cover-proposals/v14_1007_case3_final_ja/台割案3_確定_P02-11_編集用.pptx
@@ -9147,7 +9147,7 @@
         <p:spPr>
           <a:xfrm>
             <a:off x="8068024" y="4468542"/>
-            <a:ext cx="5779060" cy="777580"/>
+            <a:ext cx="4184692" cy="777580"/>
           </a:xfrm>
           <a:prstGeom prst="rect">
             <a:avLst/>
@@ -9174,7 +9174,7 @@
                 <a:ea typeface="Inter Tight SemiBold" pitchFamily="34" charset="-122"/>
                 <a:cs typeface="Inter Tight SemiBold" pitchFamily="34" charset="-120"/>
               </a:rPr>
-              <a:t>The world's largest</a:t>
+              <a:t>The partner the copper</a:t>
             </a:r>
             <a:endParaRPr lang="en-US" sz="3000" dirty="0"/>
           </a:p>
@@ -9194,7 +9194,7 @@
                 <a:ea typeface="Inter Tight SemiBold" pitchFamily="34" charset="-122"/>
                 <a:cs typeface="Inter Tight SemiBold" pitchFamily="34" charset="-120"/>
               </a:rPr>
-              <a:t>non-operating copper producer.</a:t>
+              <a:t>industry calls first.</a:t>
             </a:r>
             <a:endParaRPr lang="en-US" sz="3000" dirty="0"/>
           </a:p>

--- a/cover-proposals/v14_1007_case3_final_ja/台割案3_確定_P02-11_編集用.pptx
+++ b/cover-proposals/v14_1007_case3_final_ja/台割案3_確定_P02-11_編集用.pptx
@@ -2396,27 +2396,69 @@
         </p:nvSpPr>
         <p:spPr>
           <a:xfrm>
-            <a:off x="4319887" y="8000430"/>
-            <a:ext cx="955120" cy="109776"/>
-          </a:xfrm>
-          <a:prstGeom prst="rect">
-            <a:avLst/>
-          </a:prstGeom>
-          <a:noFill/>
-          <a:ln/>
-        </p:spPr>
-        <p:txBody>
-          <a:bodyPr wrap="none" lIns="0" tIns="0" rIns="0" bIns="0" rtlCol="0" anchor="t"/>
-          <a:lstStyle/>
-          <a:p>
-            <a:pPr algn="l" indent="0" marL="0">
-              <a:lnSpc>
-                <a:spcPts val="864"/>
-              </a:lnSpc>
-              <a:buNone/>
-            </a:pPr>
-            <a:r>
-              <a:rPr lang="en-US" sz="540" dirty="0">
+            <a:off x="6162192" y="8156963"/>
+            <a:ext cx="237971" cy="101644"/>
+          </a:xfrm>
+          <a:prstGeom prst="rect">
+            <a:avLst/>
+          </a:prstGeom>
+          <a:noFill/>
+          <a:ln/>
+        </p:spPr>
+        <p:txBody>
+          <a:bodyPr wrap="none" lIns="0" tIns="0" rIns="0" bIns="0" rtlCol="0" anchor="t"/>
+          <a:lstStyle/>
+          <a:p>
+            <a:pPr algn="l" indent="0" marL="0">
+              <a:lnSpc>
+                <a:spcPts val="800"/>
+              </a:lnSpc>
+              <a:buNone/>
+            </a:pPr>
+            <a:r>
+              <a:rPr lang="en-US" sz="640" spc="30" kern="0" dirty="0">
+                <a:solidFill>
+                  <a:srgbClr val="121519"/>
+                </a:solidFill>
+                <a:latin typeface="Noto Sans JP Medium" pitchFamily="34" charset="0"/>
+                <a:ea typeface="Noto Sans JP Medium" pitchFamily="34" charset="-122"/>
+                <a:cs typeface="Noto Sans JP Medium" pitchFamily="34" charset="-120"/>
+              </a:rPr>
+              <a:t>需要</a:t>
+            </a:r>
+            <a:endParaRPr lang="en-US" sz="640" dirty="0"/>
+          </a:p>
+        </p:txBody>
+      </p:sp>
+      <p:sp>
+        <p:nvSpPr>
+          <p:cNvPr id="28" name="Text 26"/>
+          <p:cNvSpPr/>
+          <p:nvPr/>
+        </p:nvSpPr>
+        <p:spPr>
+          <a:xfrm>
+            <a:off x="6162192" y="8265214"/>
+            <a:ext cx="520114" cy="113842"/>
+          </a:xfrm>
+          <a:prstGeom prst="rect">
+            <a:avLst/>
+          </a:prstGeom>
+          <a:noFill/>
+          <a:ln/>
+        </p:spPr>
+        <p:txBody>
+          <a:bodyPr wrap="none" lIns="0" tIns="0" rIns="0" bIns="0" rtlCol="0" anchor="t"/>
+          <a:lstStyle/>
+          <a:p>
+            <a:pPr algn="l" indent="0" marL="0">
+              <a:lnSpc>
+                <a:spcPts val="896"/>
+              </a:lnSpc>
+              <a:buNone/>
+            </a:pPr>
+            <a:r>
+              <a:rPr lang="en-US" sz="560" dirty="0">
                 <a:solidFill>
                   <a:srgbClr val="7D838A"/>
                 </a:solidFill>
@@ -2424,21 +2466,21 @@
                 <a:ea typeface="Noto Sans JP" pitchFamily="34" charset="-122"/>
                 <a:cs typeface="Noto Sans JP" pitchFamily="34" charset="-120"/>
               </a:rPr>
-              <a:t>概念図（数値は入れない）</a:t>
-            </a:r>
-            <a:endParaRPr lang="en-US" sz="540" dirty="0"/>
-          </a:p>
-        </p:txBody>
-      </p:sp>
-      <p:sp>
-        <p:nvSpPr>
-          <p:cNvPr id="28" name="Text 26"/>
-          <p:cNvSpPr/>
-          <p:nvPr/>
-        </p:nvSpPr>
-        <p:spPr>
-          <a:xfrm>
-            <a:off x="6162192" y="8156963"/>
+              <a:t>人口増・電化</a:t>
+            </a:r>
+            <a:endParaRPr lang="en-US" sz="560" dirty="0"/>
+          </a:p>
+        </p:txBody>
+      </p:sp>
+      <p:sp>
+        <p:nvSpPr>
+          <p:cNvPr id="29" name="Text 27"/>
+          <p:cNvSpPr/>
+          <p:nvPr/>
+        </p:nvSpPr>
+        <p:spPr>
+          <a:xfrm>
+            <a:off x="6263836" y="8817651"/>
             <a:ext cx="237971" cy="101644"/>
           </a:xfrm>
           <a:prstGeom prst="rect">
@@ -2460,13 +2502,13 @@
             <a:r>
               <a:rPr lang="en-US" sz="640" spc="30" kern="0" dirty="0">
                 <a:solidFill>
-                  <a:srgbClr val="121519"/>
+                  <a:srgbClr val="7D838A"/>
                 </a:solidFill>
                 <a:latin typeface="Noto Sans JP Medium" pitchFamily="34" charset="0"/>
                 <a:ea typeface="Noto Sans JP Medium" pitchFamily="34" charset="-122"/>
                 <a:cs typeface="Noto Sans JP Medium" pitchFamily="34" charset="-120"/>
               </a:rPr>
-              <a:t>需要</a:t>
+              <a:t>供給</a:t>
             </a:r>
             <a:endParaRPr lang="en-US" sz="640" dirty="0"/>
           </a:p>
@@ -2474,14 +2516,14 @@
       </p:sp>
       <p:sp>
         <p:nvSpPr>
-          <p:cNvPr id="29" name="Text 27"/>
-          <p:cNvSpPr/>
-          <p:nvPr/>
-        </p:nvSpPr>
-        <p:spPr>
-          <a:xfrm>
-            <a:off x="6162192" y="8265214"/>
-            <a:ext cx="520114" cy="113842"/>
+          <p:cNvPr id="30" name="Text 28"/>
+          <p:cNvSpPr/>
+          <p:nvPr/>
+        </p:nvSpPr>
+        <p:spPr>
+          <a:xfrm>
+            <a:off x="6263836" y="8925903"/>
+            <a:ext cx="676471" cy="113842"/>
           </a:xfrm>
           <a:prstGeom prst="rect">
             <a:avLst/>
@@ -2508,7 +2550,7 @@
                 <a:ea typeface="Noto Sans JP" pitchFamily="34" charset="-122"/>
                 <a:cs typeface="Noto Sans JP" pitchFamily="34" charset="-120"/>
               </a:rPr>
-              <a:t>人口増・電化</a:t>
+              <a:t>供給制約・地政学</a:t>
             </a:r>
             <a:endParaRPr lang="en-US" sz="560" dirty="0"/>
           </a:p>
@@ -2516,14 +2558,14 @@
       </p:sp>
       <p:sp>
         <p:nvSpPr>
-          <p:cNvPr id="30" name="Text 28"/>
-          <p:cNvSpPr/>
-          <p:nvPr/>
-        </p:nvSpPr>
-        <p:spPr>
-          <a:xfrm>
-            <a:off x="6263836" y="8817651"/>
-            <a:ext cx="237971" cy="101644"/>
+          <p:cNvPr id="31" name="Text 29"/>
+          <p:cNvSpPr/>
+          <p:nvPr/>
+        </p:nvSpPr>
+        <p:spPr>
+          <a:xfrm>
+            <a:off x="5730203" y="8716007"/>
+            <a:ext cx="534308" cy="101644"/>
           </a:xfrm>
           <a:prstGeom prst="rect">
             <a:avLst/>
@@ -2542,49 +2584,49 @@
               <a:buNone/>
             </a:pPr>
             <a:r>
-              <a:rPr lang="en-US" sz="640" spc="30" kern="0" dirty="0">
-                <a:solidFill>
-                  <a:srgbClr val="7D838A"/>
+              <a:rPr lang="en-US" sz="660" spc="190" kern="0" dirty="0">
+                <a:solidFill>
+                  <a:srgbClr val="9C7442"/>
                 </a:solidFill>
                 <a:latin typeface="Noto Sans JP Medium" pitchFamily="34" charset="0"/>
                 <a:ea typeface="Noto Sans JP Medium" pitchFamily="34" charset="-122"/>
                 <a:cs typeface="Noto Sans JP Medium" pitchFamily="34" charset="-120"/>
               </a:rPr>
-              <a:t>供給</a:t>
-            </a:r>
-            <a:endParaRPr lang="en-US" sz="640" dirty="0"/>
-          </a:p>
-        </p:txBody>
-      </p:sp>
-      <p:sp>
-        <p:nvSpPr>
-          <p:cNvPr id="31" name="Text 29"/>
-          <p:cNvSpPr/>
-          <p:nvPr/>
-        </p:nvSpPr>
-        <p:spPr>
-          <a:xfrm>
-            <a:off x="6263836" y="8925903"/>
-            <a:ext cx="676471" cy="113842"/>
-          </a:xfrm>
-          <a:prstGeom prst="rect">
-            <a:avLst/>
-          </a:prstGeom>
-          <a:noFill/>
-          <a:ln/>
-        </p:spPr>
-        <p:txBody>
-          <a:bodyPr wrap="none" lIns="0" tIns="0" rIns="0" bIns="0" rtlCol="0" anchor="t"/>
-          <a:lstStyle/>
-          <a:p>
-            <a:pPr algn="l" indent="0" marL="0">
-              <a:lnSpc>
-                <a:spcPts val="896"/>
-              </a:lnSpc>
-              <a:buNone/>
-            </a:pPr>
-            <a:r>
-              <a:rPr lang="en-US" sz="560" dirty="0">
+              <a:t>ギャップ</a:t>
+            </a:r>
+            <a:endParaRPr lang="en-US" sz="660" dirty="0"/>
+          </a:p>
+        </p:txBody>
+      </p:sp>
+      <p:sp>
+        <p:nvSpPr>
+          <p:cNvPr id="32" name="Text 30"/>
+          <p:cNvSpPr/>
+          <p:nvPr/>
+        </p:nvSpPr>
+        <p:spPr>
+          <a:xfrm>
+            <a:off x="4396120" y="9372630"/>
+            <a:ext cx="201720" cy="109776"/>
+          </a:xfrm>
+          <a:prstGeom prst="rect">
+            <a:avLst/>
+          </a:prstGeom>
+          <a:noFill/>
+          <a:ln/>
+        </p:spPr>
+        <p:txBody>
+          <a:bodyPr wrap="none" lIns="0" tIns="0" rIns="0" bIns="0" rtlCol="0" anchor="t"/>
+          <a:lstStyle/>
+          <a:p>
+            <a:pPr algn="l" indent="0" marL="0">
+              <a:lnSpc>
+                <a:spcPts val="864"/>
+              </a:lnSpc>
+              <a:buNone/>
+            </a:pPr>
+            <a:r>
+              <a:rPr lang="en-US" sz="540" dirty="0">
                 <a:solidFill>
                   <a:srgbClr val="7D838A"/>
                 </a:solidFill>
@@ -2592,22 +2634,64 @@
                 <a:ea typeface="Noto Sans JP" pitchFamily="34" charset="-122"/>
                 <a:cs typeface="Noto Sans JP" pitchFamily="34" charset="-120"/>
               </a:rPr>
-              <a:t>供給制約・地政学</a:t>
-            </a:r>
-            <a:endParaRPr lang="en-US" sz="560" dirty="0"/>
-          </a:p>
-        </p:txBody>
-      </p:sp>
-      <p:sp>
-        <p:nvSpPr>
-          <p:cNvPr id="32" name="Text 30"/>
-          <p:cNvSpPr/>
-          <p:nvPr/>
-        </p:nvSpPr>
-        <p:spPr>
-          <a:xfrm>
-            <a:off x="5730203" y="8716007"/>
-            <a:ext cx="534308" cy="101644"/>
+              <a:t>現在</a:t>
+            </a:r>
+            <a:endParaRPr lang="en-US" sz="540" dirty="0"/>
+          </a:p>
+        </p:txBody>
+      </p:sp>
+      <p:sp>
+        <p:nvSpPr>
+          <p:cNvPr id="33" name="Text 31"/>
+          <p:cNvSpPr/>
+          <p:nvPr/>
+        </p:nvSpPr>
+        <p:spPr>
+          <a:xfrm>
+            <a:off x="6543358" y="9372630"/>
+            <a:ext cx="201720" cy="109776"/>
+          </a:xfrm>
+          <a:prstGeom prst="rect">
+            <a:avLst/>
+          </a:prstGeom>
+          <a:noFill/>
+          <a:ln/>
+        </p:spPr>
+        <p:txBody>
+          <a:bodyPr wrap="none" lIns="0" tIns="0" rIns="0" bIns="0" rtlCol="0" anchor="t"/>
+          <a:lstStyle/>
+          <a:p>
+            <a:pPr algn="l" indent="0" marL="0">
+              <a:lnSpc>
+                <a:spcPts val="864"/>
+              </a:lnSpc>
+              <a:buNone/>
+            </a:pPr>
+            <a:r>
+              <a:rPr lang="en-US" sz="540" dirty="0">
+                <a:solidFill>
+                  <a:srgbClr val="7D838A"/>
+                </a:solidFill>
+                <a:latin typeface="Noto Sans JP" pitchFamily="34" charset="0"/>
+                <a:ea typeface="Noto Sans JP" pitchFamily="34" charset="-122"/>
+                <a:cs typeface="Noto Sans JP" pitchFamily="34" charset="-120"/>
+              </a:rPr>
+              <a:t>将来</a:t>
+            </a:r>
+            <a:endParaRPr lang="en-US" sz="540" dirty="0"/>
+          </a:p>
+        </p:txBody>
+      </p:sp>
+      <p:sp>
+        <p:nvSpPr>
+          <p:cNvPr id="34" name="Text 32"/>
+          <p:cNvSpPr/>
+          <p:nvPr/>
+        </p:nvSpPr>
+        <p:spPr>
+          <a:xfrm>
+            <a:off x="8068024" y="5565031"/>
+            <a:ext cx="894848" cy="101644"/>
           </a:xfrm>
           <a:prstGeom prst="rect">
             <a:avLst/>
@@ -2634,7 +2718,7 @@
                 <a:ea typeface="Noto Sans JP Medium" pitchFamily="34" charset="-122"/>
                 <a:cs typeface="Noto Sans JP Medium" pitchFamily="34" charset="-120"/>
               </a:rPr>
-              <a:t>ギャップ</a:t>
+              <a:t>コアメッセージ</a:t>
             </a:r>
             <a:endParaRPr lang="en-US" sz="660" dirty="0"/>
           </a:p>
@@ -2642,33 +2726,33 @@
       </p:sp>
       <p:sp>
         <p:nvSpPr>
-          <p:cNvPr id="33" name="Text 31"/>
-          <p:cNvSpPr/>
-          <p:nvPr/>
-        </p:nvSpPr>
-        <p:spPr>
-          <a:xfrm>
-            <a:off x="4396120" y="9372630"/>
-            <a:ext cx="201720" cy="109776"/>
-          </a:xfrm>
-          <a:prstGeom prst="rect">
-            <a:avLst/>
-          </a:prstGeom>
-          <a:noFill/>
-          <a:ln/>
-        </p:spPr>
-        <p:txBody>
-          <a:bodyPr wrap="none" lIns="0" tIns="0" rIns="0" bIns="0" rtlCol="0" anchor="t"/>
-          <a:lstStyle/>
-          <a:p>
-            <a:pPr algn="l" indent="0" marL="0">
-              <a:lnSpc>
-                <a:spcPts val="864"/>
-              </a:lnSpc>
-              <a:buNone/>
-            </a:pPr>
-            <a:r>
-              <a:rPr lang="en-US" sz="540" dirty="0">
+          <p:cNvPr id="35" name="Text 33"/>
+          <p:cNvSpPr/>
+          <p:nvPr/>
+        </p:nvSpPr>
+        <p:spPr>
+          <a:xfrm>
+            <a:off x="8068024" y="5704792"/>
+            <a:ext cx="748317" cy="127055"/>
+          </a:xfrm>
+          <a:prstGeom prst="rect">
+            <a:avLst/>
+          </a:prstGeom>
+          <a:noFill/>
+          <a:ln/>
+        </p:spPr>
+        <p:txBody>
+          <a:bodyPr wrap="none" lIns="0" tIns="0" rIns="0" bIns="0" rtlCol="0" anchor="t"/>
+          <a:lstStyle/>
+          <a:p>
+            <a:pPr algn="l" indent="0" marL="0">
+              <a:lnSpc>
+                <a:spcPts val="1000"/>
+              </a:lnSpc>
+              <a:buNone/>
+            </a:pPr>
+            <a:r>
+              <a:rPr lang="en-US" sz="660" spc="60" kern="0" dirty="0">
                 <a:solidFill>
                   <a:srgbClr val="7D838A"/>
                 </a:solidFill>
@@ -2676,64 +2760,248 @@
                 <a:ea typeface="Noto Sans JP" pitchFamily="34" charset="-122"/>
                 <a:cs typeface="Noto Sans JP" pitchFamily="34" charset="-120"/>
               </a:rPr>
-              <a:t>現在</a:t>
-            </a:r>
-            <a:endParaRPr lang="en-US" sz="540" dirty="0"/>
-          </a:p>
-        </p:txBody>
-      </p:sp>
-      <p:sp>
-        <p:nvSpPr>
-          <p:cNvPr id="34" name="Text 32"/>
-          <p:cNvSpPr/>
-          <p:nvPr/>
-        </p:nvSpPr>
-        <p:spPr>
-          <a:xfrm>
-            <a:off x="6543358" y="9372630"/>
-            <a:ext cx="201720" cy="109776"/>
-          </a:xfrm>
-          <a:prstGeom prst="rect">
-            <a:avLst/>
-          </a:prstGeom>
-          <a:noFill/>
-          <a:ln/>
-        </p:spPr>
-        <p:txBody>
-          <a:bodyPr wrap="none" lIns="0" tIns="0" rIns="0" bIns="0" rtlCol="0" anchor="t"/>
-          <a:lstStyle/>
-          <a:p>
-            <a:pPr algn="l" indent="0" marL="0">
-              <a:lnSpc>
-                <a:spcPts val="864"/>
-              </a:lnSpc>
-              <a:buNone/>
-            </a:pPr>
-            <a:r>
-              <a:rPr lang="en-US" sz="540" dirty="0">
-                <a:solidFill>
-                  <a:srgbClr val="7D838A"/>
+              <a:t>コアメッセージ</a:t>
+            </a:r>
+            <a:endParaRPr lang="en-US" sz="660" dirty="0"/>
+          </a:p>
+        </p:txBody>
+      </p:sp>
+      <p:sp>
+        <p:nvSpPr>
+          <p:cNvPr id="36" name="Text 34"/>
+          <p:cNvSpPr/>
+          <p:nvPr/>
+        </p:nvSpPr>
+        <p:spPr>
+          <a:xfrm>
+            <a:off x="8068024" y="5964620"/>
+            <a:ext cx="4628652" cy="1120629"/>
+          </a:xfrm>
+          <a:prstGeom prst="rect">
+            <a:avLst/>
+          </a:prstGeom>
+          <a:noFill/>
+          <a:ln/>
+        </p:spPr>
+        <p:txBody>
+          <a:bodyPr wrap="none" lIns="0" tIns="0" rIns="0" bIns="0" rtlCol="0" anchor="t"/>
+          <a:lstStyle/>
+          <a:p>
+            <a:pPr algn="l" indent="0" marL="0">
+              <a:lnSpc>
+                <a:spcPts val="4410"/>
+              </a:lnSpc>
+              <a:buNone/>
+            </a:pPr>
+            <a:r>
+              <a:rPr lang="en-US" sz="4200" spc="-84" kern="0" dirty="0">
+                <a:solidFill>
+                  <a:srgbClr val="121519"/>
+                </a:solidFill>
+                <a:latin typeface="Inter Tight Light" pitchFamily="34" charset="0"/>
+                <a:ea typeface="Inter Tight Light" pitchFamily="34" charset="-122"/>
+                <a:cs typeface="Inter Tight Light" pitchFamily="34" charset="-120"/>
+              </a:rPr>
+              <a:t>Strength to Hold.</a:t>
+            </a:r>
+            <a:endParaRPr lang="en-US" sz="4200" dirty="0"/>
+          </a:p>
+          <a:p>
+            <a:pPr algn="l" indent="0" marL="0">
+              <a:lnSpc>
+                <a:spcPts val="4410"/>
+              </a:lnSpc>
+              <a:buNone/>
+            </a:pPr>
+            <a:r>
+              <a:rPr lang="en-US" sz="4200" spc="-84" kern="0" dirty="0">
+                <a:solidFill>
+                  <a:srgbClr val="121519"/>
+                </a:solidFill>
+                <a:latin typeface="Inter Tight Light" pitchFamily="34" charset="0"/>
+                <a:ea typeface="Inter Tight Light" pitchFamily="34" charset="-122"/>
+                <a:cs typeface="Inter Tight Light" pitchFamily="34" charset="-120"/>
+              </a:rPr>
+              <a:t>Power to Connect.</a:t>
+            </a:r>
+            <a:endParaRPr lang="en-US" sz="4200" dirty="0"/>
+          </a:p>
+        </p:txBody>
+      </p:sp>
+      <p:sp>
+        <p:nvSpPr>
+          <p:cNvPr id="37" name="Text 35"/>
+          <p:cNvSpPr/>
+          <p:nvPr/>
+        </p:nvSpPr>
+        <p:spPr>
+          <a:xfrm>
+            <a:off x="8068024" y="7188165"/>
+            <a:ext cx="1930390" cy="247758"/>
+          </a:xfrm>
+          <a:prstGeom prst="rect">
+            <a:avLst/>
+          </a:prstGeom>
+          <a:noFill/>
+          <a:ln/>
+        </p:spPr>
+        <p:txBody>
+          <a:bodyPr wrap="none" lIns="0" tIns="0" rIns="0" bIns="0" rtlCol="0" anchor="t"/>
+          <a:lstStyle/>
+          <a:p>
+            <a:pPr algn="l" indent="0" marL="0">
+              <a:lnSpc>
+                <a:spcPts val="1950"/>
+              </a:lnSpc>
+              <a:buNone/>
+            </a:pPr>
+            <a:r>
+              <a:rPr lang="en-US" sz="1300" spc="50" kern="0" dirty="0">
+                <a:solidFill>
+                  <a:srgbClr val="121519"/>
+                </a:solidFill>
+                <a:latin typeface="Noto Sans JP Medium" pitchFamily="34" charset="0"/>
+                <a:ea typeface="Noto Sans JP Medium" pitchFamily="34" charset="-122"/>
+                <a:cs typeface="Noto Sans JP Medium" pitchFamily="34" charset="-120"/>
+              </a:rPr>
+              <a:t>持つ力と、つなぐ力。</a:t>
+            </a:r>
+            <a:endParaRPr lang="en-US" sz="1300" dirty="0"/>
+          </a:p>
+        </p:txBody>
+      </p:sp>
+      <p:sp>
+        <p:nvSpPr>
+          <p:cNvPr id="38" name="Text 36"/>
+          <p:cNvSpPr/>
+          <p:nvPr/>
+        </p:nvSpPr>
+        <p:spPr>
+          <a:xfrm>
+            <a:off x="8068024" y="7488365"/>
+            <a:ext cx="4243654" cy="904953"/>
+          </a:xfrm>
+          <a:prstGeom prst="rect">
+            <a:avLst/>
+          </a:prstGeom>
+          <a:noFill/>
+          <a:ln/>
+        </p:spPr>
+        <p:txBody>
+          <a:bodyPr wrap="none" lIns="0" tIns="0" rIns="0" bIns="0" rtlCol="0" anchor="t"/>
+          <a:lstStyle/>
+          <a:p>
+            <a:pPr algn="l" indent="0" marL="0">
+              <a:lnSpc>
+                <a:spcPts val="1425"/>
+              </a:lnSpc>
+              <a:buNone/>
+            </a:pPr>
+            <a:r>
+              <a:rPr lang="en-US" sz="770" spc="20" kern="0" dirty="0">
+                <a:solidFill>
+                  <a:srgbClr val="3D4249"/>
                 </a:solidFill>
                 <a:latin typeface="Noto Sans JP" pitchFamily="34" charset="0"/>
                 <a:ea typeface="Noto Sans JP" pitchFamily="34" charset="-122"/>
                 <a:cs typeface="Noto Sans JP" pitchFamily="34" charset="-120"/>
               </a:rPr>
-              <a:t>将来</a:t>
-            </a:r>
-            <a:endParaRPr lang="en-US" sz="540" dirty="0"/>
-          </a:p>
-        </p:txBody>
-      </p:sp>
-      <p:sp>
-        <p:nvSpPr>
-          <p:cNvPr id="35" name="Text 33"/>
-          <p:cNvSpPr/>
-          <p:nvPr/>
-        </p:nvSpPr>
-        <p:spPr>
-          <a:xfrm>
-            <a:off x="8068024" y="5565031"/>
-            <a:ext cx="894848" cy="101644"/>
+              <a:t>資源は、そこに「ある」だけでは、まだ価値ではありません。誰かが見出し、育て、</a:t>
+            </a:r>
+            <a:endParaRPr lang="en-US" sz="770" dirty="0"/>
+          </a:p>
+          <a:p>
+            <a:pPr algn="l" indent="0" marL="0">
+              <a:lnSpc>
+                <a:spcPts val="1425"/>
+              </a:lnSpc>
+              <a:buNone/>
+            </a:pPr>
+            <a:r>
+              <a:rPr lang="en-US" sz="770" spc="20" kern="0" dirty="0">
+                <a:solidFill>
+                  <a:srgbClr val="3D4249"/>
+                </a:solidFill>
+                <a:latin typeface="Noto Sans JP" pitchFamily="34" charset="0"/>
+                <a:ea typeface="Noto Sans JP" pitchFamily="34" charset="-122"/>
+                <a:cs typeface="Noto Sans JP" pitchFamily="34" charset="-120"/>
+              </a:rPr>
+              <a:t>必要とする場所へ届けて、はじめて力になる。私たちは、世界有数の資産に関わり、</a:t>
+            </a:r>
+            <a:endParaRPr lang="en-US" sz="770" dirty="0"/>
+          </a:p>
+          <a:p>
+            <a:pPr algn="l" indent="0" marL="0">
+              <a:lnSpc>
+                <a:spcPts val="1425"/>
+              </a:lnSpc>
+              <a:buNone/>
+            </a:pPr>
+            <a:r>
+              <a:rPr lang="en-US" sz="770" spc="20" kern="0" dirty="0">
+                <a:solidFill>
+                  <a:srgbClr val="3D4249"/>
+                </a:solidFill>
+                <a:latin typeface="Noto Sans JP" pitchFamily="34" charset="0"/>
+                <a:ea typeface="Noto Sans JP" pitchFamily="34" charset="-122"/>
+                <a:cs typeface="Noto Sans JP" pitchFamily="34" charset="-120"/>
+              </a:rPr>
+              <a:t>投資とトレーディングの両輪で川上から川下までをつなぎます。フェアな立場だから</a:t>
+            </a:r>
+            <a:endParaRPr lang="en-US" sz="770" dirty="0"/>
+          </a:p>
+          <a:p>
+            <a:pPr algn="l" indent="0" marL="0">
+              <a:lnSpc>
+                <a:spcPts val="1425"/>
+              </a:lnSpc>
+              <a:buNone/>
+            </a:pPr>
+            <a:r>
+              <a:rPr lang="en-US" sz="770" spc="20" kern="0" dirty="0">
+                <a:solidFill>
+                  <a:srgbClr val="3D4249"/>
+                </a:solidFill>
+                <a:latin typeface="Noto Sans JP" pitchFamily="34" charset="0"/>
+                <a:ea typeface="Noto Sans JP" pitchFamily="34" charset="-122"/>
+                <a:cs typeface="Noto Sans JP" pitchFamily="34" charset="-120"/>
+              </a:rPr>
+              <a:t>こそ、埋められる隙間がある。多様なパートナーと使い手の間に立ち、その時々の最</a:t>
+            </a:r>
+            <a:endParaRPr lang="en-US" sz="770" dirty="0"/>
+          </a:p>
+          <a:p>
+            <a:pPr algn="l" indent="0" marL="0">
+              <a:lnSpc>
+                <a:spcPts val="1425"/>
+              </a:lnSpc>
+              <a:buNone/>
+            </a:pPr>
+            <a:r>
+              <a:rPr lang="en-US" sz="770" spc="20" kern="0" dirty="0">
+                <a:solidFill>
+                  <a:srgbClr val="3D4249"/>
+                </a:solidFill>
+                <a:latin typeface="Noto Sans JP" pitchFamily="34" charset="0"/>
+                <a:ea typeface="Noto Sans JP" pitchFamily="34" charset="-122"/>
+                <a:cs typeface="Noto Sans JP" pitchFamily="34" charset="-120"/>
+              </a:rPr>
+              <a:t>適解を導く。世界に眠る価値を、社会の力へ。</a:t>
+            </a:r>
+            <a:endParaRPr lang="en-US" sz="770" dirty="0"/>
+          </a:p>
+        </p:txBody>
+      </p:sp>
+      <p:sp>
+        <p:nvSpPr>
+          <p:cNvPr id="39" name="Text 37"/>
+          <p:cNvSpPr/>
+          <p:nvPr/>
+        </p:nvSpPr>
+        <p:spPr>
+          <a:xfrm>
+            <a:off x="12260855" y="7496274"/>
+            <a:ext cx="288416" cy="101644"/>
           </a:xfrm>
           <a:prstGeom prst="rect">
             <a:avLst/>
@@ -2760,7 +3028,7 @@
                 <a:ea typeface="Noto Sans JP Medium" pitchFamily="34" charset="-122"/>
                 <a:cs typeface="Noto Sans JP Medium" pitchFamily="34" charset="-120"/>
               </a:rPr>
-              <a:t>コアメッセージ</a:t>
+              <a:t>目次</a:t>
             </a:r>
             <a:endParaRPr lang="en-US" sz="660" dirty="0"/>
           </a:p>
@@ -2768,435 +3036,881 @@
       </p:sp>
       <p:sp>
         <p:nvSpPr>
-          <p:cNvPr id="36" name="Text 34"/>
-          <p:cNvSpPr/>
-          <p:nvPr/>
-        </p:nvSpPr>
-        <p:spPr>
-          <a:xfrm>
-            <a:off x="8068024" y="5704792"/>
-            <a:ext cx="748317" cy="127055"/>
-          </a:xfrm>
-          <a:prstGeom prst="rect">
-            <a:avLst/>
-          </a:prstGeom>
-          <a:noFill/>
-          <a:ln/>
-        </p:spPr>
-        <p:txBody>
-          <a:bodyPr wrap="none" lIns="0" tIns="0" rIns="0" bIns="0" rtlCol="0" anchor="t"/>
-          <a:lstStyle/>
-          <a:p>
-            <a:pPr algn="l" indent="0" marL="0">
-              <a:lnSpc>
-                <a:spcPts val="1000"/>
-              </a:lnSpc>
-              <a:buNone/>
-            </a:pPr>
-            <a:r>
-              <a:rPr lang="en-US" sz="660" spc="60" kern="0" dirty="0">
+          <p:cNvPr id="40" name="Text 38"/>
+          <p:cNvSpPr/>
+          <p:nvPr/>
+        </p:nvSpPr>
+        <p:spPr>
+          <a:xfrm>
+            <a:off x="12260855" y="7775796"/>
+            <a:ext cx="154114" cy="101644"/>
+          </a:xfrm>
+          <a:prstGeom prst="rect">
+            <a:avLst/>
+          </a:prstGeom>
+          <a:noFill/>
+          <a:ln/>
+        </p:spPr>
+        <p:txBody>
+          <a:bodyPr wrap="none" lIns="0" tIns="0" rIns="0" bIns="0" rtlCol="0" anchor="t"/>
+          <a:lstStyle/>
+          <a:p>
+            <a:pPr algn="l" indent="0" marL="0">
+              <a:lnSpc>
+                <a:spcPts val="800"/>
+              </a:lnSpc>
+              <a:buNone/>
+            </a:pPr>
+            <a:r>
+              <a:rPr lang="en-US" sz="640" spc="30" kern="0" dirty="0">
+                <a:solidFill>
+                  <a:srgbClr val="9C7442"/>
+                </a:solidFill>
+                <a:latin typeface="Inter Medium" pitchFamily="34" charset="0"/>
+                <a:ea typeface="Inter Medium" pitchFamily="34" charset="-122"/>
+                <a:cs typeface="Inter Medium" pitchFamily="34" charset="-120"/>
+              </a:rPr>
+              <a:t>01</a:t>
+            </a:r>
+            <a:endParaRPr lang="en-US" sz="640" dirty="0"/>
+          </a:p>
+        </p:txBody>
+      </p:sp>
+      <p:sp>
+        <p:nvSpPr>
+          <p:cNvPr id="41" name="Text 39"/>
+          <p:cNvSpPr/>
+          <p:nvPr/>
+        </p:nvSpPr>
+        <p:spPr>
+          <a:xfrm>
+            <a:off x="12514966" y="7775796"/>
+            <a:ext cx="616199" cy="101644"/>
+          </a:xfrm>
+          <a:prstGeom prst="rect">
+            <a:avLst/>
+          </a:prstGeom>
+          <a:noFill/>
+          <a:ln/>
+        </p:spPr>
+        <p:txBody>
+          <a:bodyPr wrap="none" lIns="0" tIns="0" rIns="0" bIns="0" rtlCol="0" anchor="t"/>
+          <a:lstStyle/>
+          <a:p>
+            <a:pPr algn="l" indent="0" marL="0">
+              <a:lnSpc>
+                <a:spcPts val="800"/>
+              </a:lnSpc>
+              <a:buNone/>
+            </a:pPr>
+            <a:r>
+              <a:rPr lang="en-US" sz="640" spc="30" kern="0" dirty="0">
+                <a:solidFill>
+                  <a:srgbClr val="121519"/>
+                </a:solidFill>
+                <a:latin typeface="Noto Sans JP Medium" pitchFamily="34" charset="0"/>
+                <a:ea typeface="Noto Sans JP Medium" pitchFamily="34" charset="-122"/>
+                <a:cs typeface="Noto Sans JP Medium" pitchFamily="34" charset="-120"/>
+              </a:rPr>
+              <a:t>我々は何者か</a:t>
+            </a:r>
+            <a:endParaRPr lang="en-US" sz="640" dirty="0"/>
+          </a:p>
+        </p:txBody>
+      </p:sp>
+      <p:sp>
+        <p:nvSpPr>
+          <p:cNvPr id="42" name="Text 40"/>
+          <p:cNvSpPr/>
+          <p:nvPr/>
+        </p:nvSpPr>
+        <p:spPr>
+          <a:xfrm>
+            <a:off x="14357271" y="7775796"/>
+            <a:ext cx="305013" cy="76233"/>
+          </a:xfrm>
+          <a:prstGeom prst="rect">
+            <a:avLst/>
+          </a:prstGeom>
+          <a:noFill/>
+          <a:ln/>
+        </p:spPr>
+        <p:txBody>
+          <a:bodyPr wrap="none" lIns="0" tIns="0" rIns="0" bIns="0" rtlCol="0" anchor="t"/>
+          <a:lstStyle/>
+          <a:p>
+            <a:pPr algn="l" indent="0" marL="0">
+              <a:lnSpc>
+                <a:spcPts val="600"/>
+              </a:lnSpc>
+              <a:buNone/>
+            </a:pPr>
+            <a:r>
+              <a:rPr lang="en-US" sz="540" spc="160" kern="0" dirty="0">
                 <a:solidFill>
                   <a:srgbClr val="7D838A"/>
+                </a:solidFill>
+                <a:latin typeface="Inter Medium" pitchFamily="34" charset="0"/>
+                <a:ea typeface="Inter Medium" pitchFamily="34" charset="-122"/>
+                <a:cs typeface="Inter Medium" pitchFamily="34" charset="-120"/>
+              </a:rPr>
+              <a:t>P.04</a:t>
+            </a:r>
+            <a:endParaRPr lang="en-US" sz="540" dirty="0"/>
+          </a:p>
+        </p:txBody>
+      </p:sp>
+      <p:sp>
+        <p:nvSpPr>
+          <p:cNvPr id="43" name="Text 41"/>
+          <p:cNvSpPr/>
+          <p:nvPr/>
+        </p:nvSpPr>
+        <p:spPr>
+          <a:xfrm>
+            <a:off x="12260855" y="8042613"/>
+            <a:ext cx="172021" cy="101644"/>
+          </a:xfrm>
+          <a:prstGeom prst="rect">
+            <a:avLst/>
+          </a:prstGeom>
+          <a:noFill/>
+          <a:ln/>
+        </p:spPr>
+        <p:txBody>
+          <a:bodyPr wrap="none" lIns="0" tIns="0" rIns="0" bIns="0" rtlCol="0" anchor="t"/>
+          <a:lstStyle/>
+          <a:p>
+            <a:pPr algn="l" indent="0" marL="0">
+              <a:lnSpc>
+                <a:spcPts val="800"/>
+              </a:lnSpc>
+              <a:buNone/>
+            </a:pPr>
+            <a:r>
+              <a:rPr lang="en-US" sz="640" spc="30" kern="0" dirty="0">
+                <a:solidFill>
+                  <a:srgbClr val="9C7442"/>
+                </a:solidFill>
+                <a:latin typeface="Inter Medium" pitchFamily="34" charset="0"/>
+                <a:ea typeface="Inter Medium" pitchFamily="34" charset="-122"/>
+                <a:cs typeface="Inter Medium" pitchFamily="34" charset="-120"/>
+              </a:rPr>
+              <a:t>02</a:t>
+            </a:r>
+            <a:endParaRPr lang="en-US" sz="640" dirty="0"/>
+          </a:p>
+        </p:txBody>
+      </p:sp>
+      <p:sp>
+        <p:nvSpPr>
+          <p:cNvPr id="44" name="Text 42"/>
+          <p:cNvSpPr/>
+          <p:nvPr/>
+        </p:nvSpPr>
+        <p:spPr>
+          <a:xfrm>
+            <a:off x="12514966" y="8042613"/>
+            <a:ext cx="522734" cy="101644"/>
+          </a:xfrm>
+          <a:prstGeom prst="rect">
+            <a:avLst/>
+          </a:prstGeom>
+          <a:noFill/>
+          <a:ln/>
+        </p:spPr>
+        <p:txBody>
+          <a:bodyPr wrap="none" lIns="0" tIns="0" rIns="0" bIns="0" rtlCol="0" anchor="t"/>
+          <a:lstStyle/>
+          <a:p>
+            <a:pPr algn="l" indent="0" marL="0">
+              <a:lnSpc>
+                <a:spcPts val="800"/>
+              </a:lnSpc>
+              <a:buNone/>
+            </a:pPr>
+            <a:r>
+              <a:rPr lang="en-US" sz="640" spc="30" kern="0" dirty="0">
+                <a:solidFill>
+                  <a:srgbClr val="121519"/>
+                </a:solidFill>
+                <a:latin typeface="Noto Sans JP Medium" pitchFamily="34" charset="0"/>
+                <a:ea typeface="Noto Sans JP Medium" pitchFamily="34" charset="-122"/>
+                <a:cs typeface="Noto Sans JP Medium" pitchFamily="34" charset="-120"/>
+              </a:rPr>
+              <a:t>資産の強み</a:t>
+            </a:r>
+            <a:endParaRPr lang="en-US" sz="640" dirty="0"/>
+          </a:p>
+        </p:txBody>
+      </p:sp>
+      <p:sp>
+        <p:nvSpPr>
+          <p:cNvPr id="45" name="Text 43"/>
+          <p:cNvSpPr/>
+          <p:nvPr/>
+        </p:nvSpPr>
+        <p:spPr>
+          <a:xfrm>
+            <a:off x="14357271" y="8042613"/>
+            <a:ext cx="301082" cy="76233"/>
+          </a:xfrm>
+          <a:prstGeom prst="rect">
+            <a:avLst/>
+          </a:prstGeom>
+          <a:noFill/>
+          <a:ln/>
+        </p:spPr>
+        <p:txBody>
+          <a:bodyPr wrap="none" lIns="0" tIns="0" rIns="0" bIns="0" rtlCol="0" anchor="t"/>
+          <a:lstStyle/>
+          <a:p>
+            <a:pPr algn="l" indent="0" marL="0">
+              <a:lnSpc>
+                <a:spcPts val="600"/>
+              </a:lnSpc>
+              <a:buNone/>
+            </a:pPr>
+            <a:r>
+              <a:rPr lang="en-US" sz="540" spc="160" kern="0" dirty="0">
+                <a:solidFill>
+                  <a:srgbClr val="7D838A"/>
+                </a:solidFill>
+                <a:latin typeface="Inter Medium" pitchFamily="34" charset="0"/>
+                <a:ea typeface="Inter Medium" pitchFamily="34" charset="-122"/>
+                <a:cs typeface="Inter Medium" pitchFamily="34" charset="-120"/>
+              </a:rPr>
+              <a:t>P.05</a:t>
+            </a:r>
+            <a:endParaRPr lang="en-US" sz="540" dirty="0"/>
+          </a:p>
+        </p:txBody>
+      </p:sp>
+      <p:sp>
+        <p:nvSpPr>
+          <p:cNvPr id="46" name="Text 44"/>
+          <p:cNvSpPr/>
+          <p:nvPr/>
+        </p:nvSpPr>
+        <p:spPr>
+          <a:xfrm>
+            <a:off x="12260855" y="8309429"/>
+            <a:ext cx="172895" cy="101644"/>
+          </a:xfrm>
+          <a:prstGeom prst="rect">
+            <a:avLst/>
+          </a:prstGeom>
+          <a:noFill/>
+          <a:ln/>
+        </p:spPr>
+        <p:txBody>
+          <a:bodyPr wrap="none" lIns="0" tIns="0" rIns="0" bIns="0" rtlCol="0" anchor="t"/>
+          <a:lstStyle/>
+          <a:p>
+            <a:pPr algn="l" indent="0" marL="0">
+              <a:lnSpc>
+                <a:spcPts val="800"/>
+              </a:lnSpc>
+              <a:buNone/>
+            </a:pPr>
+            <a:r>
+              <a:rPr lang="en-US" sz="640" spc="30" kern="0" dirty="0">
+                <a:solidFill>
+                  <a:srgbClr val="9C7442"/>
+                </a:solidFill>
+                <a:latin typeface="Inter Medium" pitchFamily="34" charset="0"/>
+                <a:ea typeface="Inter Medium" pitchFamily="34" charset="-122"/>
+                <a:cs typeface="Inter Medium" pitchFamily="34" charset="-120"/>
+              </a:rPr>
+              <a:t>03</a:t>
+            </a:r>
+            <a:endParaRPr lang="en-US" sz="640" dirty="0"/>
+          </a:p>
+        </p:txBody>
+      </p:sp>
+      <p:sp>
+        <p:nvSpPr>
+          <p:cNvPr id="47" name="Text 45"/>
+          <p:cNvSpPr/>
+          <p:nvPr/>
+        </p:nvSpPr>
+        <p:spPr>
+          <a:xfrm>
+            <a:off x="12514966" y="8309429"/>
+            <a:ext cx="520550" cy="101644"/>
+          </a:xfrm>
+          <a:prstGeom prst="rect">
+            <a:avLst/>
+          </a:prstGeom>
+          <a:noFill/>
+          <a:ln/>
+        </p:spPr>
+        <p:txBody>
+          <a:bodyPr wrap="none" lIns="0" tIns="0" rIns="0" bIns="0" rtlCol="0" anchor="t"/>
+          <a:lstStyle/>
+          <a:p>
+            <a:pPr algn="l" indent="0" marL="0">
+              <a:lnSpc>
+                <a:spcPts val="800"/>
+              </a:lnSpc>
+              <a:buNone/>
+            </a:pPr>
+            <a:r>
+              <a:rPr lang="en-US" sz="640" spc="30" kern="0" dirty="0">
+                <a:solidFill>
+                  <a:srgbClr val="121519"/>
+                </a:solidFill>
+                <a:latin typeface="Noto Sans JP Medium" pitchFamily="34" charset="0"/>
+                <a:ea typeface="Noto Sans JP Medium" pitchFamily="34" charset="-122"/>
+                <a:cs typeface="Noto Sans JP Medium" pitchFamily="34" charset="-120"/>
+              </a:rPr>
+              <a:t>原料炭と銅</a:t>
+            </a:r>
+            <a:endParaRPr lang="en-US" sz="640" dirty="0"/>
+          </a:p>
+        </p:txBody>
+      </p:sp>
+      <p:sp>
+        <p:nvSpPr>
+          <p:cNvPr id="48" name="Text 46"/>
+          <p:cNvSpPr/>
+          <p:nvPr/>
+        </p:nvSpPr>
+        <p:spPr>
+          <a:xfrm>
+            <a:off x="14357271" y="8309429"/>
+            <a:ext cx="303047" cy="76233"/>
+          </a:xfrm>
+          <a:prstGeom prst="rect">
+            <a:avLst/>
+          </a:prstGeom>
+          <a:noFill/>
+          <a:ln/>
+        </p:spPr>
+        <p:txBody>
+          <a:bodyPr wrap="none" lIns="0" tIns="0" rIns="0" bIns="0" rtlCol="0" anchor="t"/>
+          <a:lstStyle/>
+          <a:p>
+            <a:pPr algn="l" indent="0" marL="0">
+              <a:lnSpc>
+                <a:spcPts val="600"/>
+              </a:lnSpc>
+              <a:buNone/>
+            </a:pPr>
+            <a:r>
+              <a:rPr lang="en-US" sz="540" spc="160" kern="0" dirty="0">
+                <a:solidFill>
+                  <a:srgbClr val="7D838A"/>
+                </a:solidFill>
+                <a:latin typeface="Inter Medium" pitchFamily="34" charset="0"/>
+                <a:ea typeface="Inter Medium" pitchFamily="34" charset="-122"/>
+                <a:cs typeface="Inter Medium" pitchFamily="34" charset="-120"/>
+              </a:rPr>
+              <a:t>P.06</a:t>
+            </a:r>
+            <a:endParaRPr lang="en-US" sz="540" dirty="0"/>
+          </a:p>
+        </p:txBody>
+      </p:sp>
+      <p:sp>
+        <p:nvSpPr>
+          <p:cNvPr id="49" name="Text 47"/>
+          <p:cNvSpPr/>
+          <p:nvPr/>
+        </p:nvSpPr>
+        <p:spPr>
+          <a:xfrm>
+            <a:off x="12260855" y="8576246"/>
+            <a:ext cx="175515" cy="101644"/>
+          </a:xfrm>
+          <a:prstGeom prst="rect">
+            <a:avLst/>
+          </a:prstGeom>
+          <a:noFill/>
+          <a:ln/>
+        </p:spPr>
+        <p:txBody>
+          <a:bodyPr wrap="none" lIns="0" tIns="0" rIns="0" bIns="0" rtlCol="0" anchor="t"/>
+          <a:lstStyle/>
+          <a:p>
+            <a:pPr algn="l" indent="0" marL="0">
+              <a:lnSpc>
+                <a:spcPts val="800"/>
+              </a:lnSpc>
+              <a:buNone/>
+            </a:pPr>
+            <a:r>
+              <a:rPr lang="en-US" sz="640" spc="30" kern="0" dirty="0">
+                <a:solidFill>
+                  <a:srgbClr val="9C7442"/>
+                </a:solidFill>
+                <a:latin typeface="Inter Medium" pitchFamily="34" charset="0"/>
+                <a:ea typeface="Inter Medium" pitchFamily="34" charset="-122"/>
+                <a:cs typeface="Inter Medium" pitchFamily="34" charset="-120"/>
+              </a:rPr>
+              <a:t>04</a:t>
+            </a:r>
+            <a:endParaRPr lang="en-US" sz="640" dirty="0"/>
+          </a:p>
+        </p:txBody>
+      </p:sp>
+      <p:sp>
+        <p:nvSpPr>
+          <p:cNvPr id="50" name="Text 48"/>
+          <p:cNvSpPr/>
+          <p:nvPr/>
+        </p:nvSpPr>
+        <p:spPr>
+          <a:xfrm>
+            <a:off x="12514966" y="8576246"/>
+            <a:ext cx="711848" cy="101644"/>
+          </a:xfrm>
+          <a:prstGeom prst="rect">
+            <a:avLst/>
+          </a:prstGeom>
+          <a:noFill/>
+          <a:ln/>
+        </p:spPr>
+        <p:txBody>
+          <a:bodyPr wrap="none" lIns="0" tIns="0" rIns="0" bIns="0" rtlCol="0" anchor="t"/>
+          <a:lstStyle/>
+          <a:p>
+            <a:pPr algn="l" indent="0" marL="0">
+              <a:lnSpc>
+                <a:spcPts val="800"/>
+              </a:lnSpc>
+              <a:buNone/>
+            </a:pPr>
+            <a:r>
+              <a:rPr lang="en-US" sz="640" spc="30" kern="0" dirty="0">
+                <a:solidFill>
+                  <a:srgbClr val="121519"/>
+                </a:solidFill>
+                <a:latin typeface="Noto Sans JP Medium" pitchFamily="34" charset="0"/>
+                <a:ea typeface="Noto Sans JP Medium" pitchFamily="34" charset="-122"/>
+                <a:cs typeface="Noto Sans JP Medium" pitchFamily="34" charset="-120"/>
+              </a:rPr>
+              <a:t>資源から価値へ</a:t>
+            </a:r>
+            <a:endParaRPr lang="en-US" sz="640" dirty="0"/>
+          </a:p>
+        </p:txBody>
+      </p:sp>
+      <p:sp>
+        <p:nvSpPr>
+          <p:cNvPr id="51" name="Text 49"/>
+          <p:cNvSpPr/>
+          <p:nvPr/>
+        </p:nvSpPr>
+        <p:spPr>
+          <a:xfrm>
+            <a:off x="14357271" y="8576246"/>
+            <a:ext cx="303047" cy="76233"/>
+          </a:xfrm>
+          <a:prstGeom prst="rect">
+            <a:avLst/>
+          </a:prstGeom>
+          <a:noFill/>
+          <a:ln/>
+        </p:spPr>
+        <p:txBody>
+          <a:bodyPr wrap="none" lIns="0" tIns="0" rIns="0" bIns="0" rtlCol="0" anchor="t"/>
+          <a:lstStyle/>
+          <a:p>
+            <a:pPr algn="l" indent="0" marL="0">
+              <a:lnSpc>
+                <a:spcPts val="600"/>
+              </a:lnSpc>
+              <a:buNone/>
+            </a:pPr>
+            <a:r>
+              <a:rPr lang="en-US" sz="540" spc="160" kern="0" dirty="0">
+                <a:solidFill>
+                  <a:srgbClr val="7D838A"/>
+                </a:solidFill>
+                <a:latin typeface="Inter Medium" pitchFamily="34" charset="0"/>
+                <a:ea typeface="Inter Medium" pitchFamily="34" charset="-122"/>
+                <a:cs typeface="Inter Medium" pitchFamily="34" charset="-120"/>
+              </a:rPr>
+              <a:t>P.08</a:t>
+            </a:r>
+            <a:endParaRPr lang="en-US" sz="540" dirty="0"/>
+          </a:p>
+        </p:txBody>
+      </p:sp>
+      <p:sp>
+        <p:nvSpPr>
+          <p:cNvPr id="52" name="Text 50"/>
+          <p:cNvSpPr/>
+          <p:nvPr/>
+        </p:nvSpPr>
+        <p:spPr>
+          <a:xfrm>
+            <a:off x="12260855" y="8843063"/>
+            <a:ext cx="170929" cy="101644"/>
+          </a:xfrm>
+          <a:prstGeom prst="rect">
+            <a:avLst/>
+          </a:prstGeom>
+          <a:noFill/>
+          <a:ln/>
+        </p:spPr>
+        <p:txBody>
+          <a:bodyPr wrap="none" lIns="0" tIns="0" rIns="0" bIns="0" rtlCol="0" anchor="t"/>
+          <a:lstStyle/>
+          <a:p>
+            <a:pPr algn="l" indent="0" marL="0">
+              <a:lnSpc>
+                <a:spcPts val="800"/>
+              </a:lnSpc>
+              <a:buNone/>
+            </a:pPr>
+            <a:r>
+              <a:rPr lang="en-US" sz="640" spc="30" kern="0" dirty="0">
+                <a:solidFill>
+                  <a:srgbClr val="9C7442"/>
+                </a:solidFill>
+                <a:latin typeface="Inter Medium" pitchFamily="34" charset="0"/>
+                <a:ea typeface="Inter Medium" pitchFamily="34" charset="-122"/>
+                <a:cs typeface="Inter Medium" pitchFamily="34" charset="-120"/>
+              </a:rPr>
+              <a:t>05</a:t>
+            </a:r>
+            <a:endParaRPr lang="en-US" sz="640" dirty="0"/>
+          </a:p>
+        </p:txBody>
+      </p:sp>
+      <p:sp>
+        <p:nvSpPr>
+          <p:cNvPr id="53" name="Text 51"/>
+          <p:cNvSpPr/>
+          <p:nvPr/>
+        </p:nvSpPr>
+        <p:spPr>
+          <a:xfrm>
+            <a:off x="12514966" y="8843063"/>
+            <a:ext cx="811646" cy="101644"/>
+          </a:xfrm>
+          <a:prstGeom prst="rect">
+            <a:avLst/>
+          </a:prstGeom>
+          <a:noFill/>
+          <a:ln/>
+        </p:spPr>
+        <p:txBody>
+          <a:bodyPr wrap="none" lIns="0" tIns="0" rIns="0" bIns="0" rtlCol="0" anchor="t"/>
+          <a:lstStyle/>
+          <a:p>
+            <a:pPr algn="l" indent="0" marL="0">
+              <a:lnSpc>
+                <a:spcPts val="800"/>
+              </a:lnSpc>
+              <a:buNone/>
+            </a:pPr>
+            <a:r>
+              <a:rPr lang="en-US" sz="640" spc="30" kern="0" dirty="0">
+                <a:solidFill>
+                  <a:srgbClr val="121519"/>
+                </a:solidFill>
+                <a:latin typeface="Noto Sans JP Medium" pitchFamily="34" charset="0"/>
+                <a:ea typeface="Noto Sans JP Medium" pitchFamily="34" charset="-122"/>
+                <a:cs typeface="Noto Sans JP Medium" pitchFamily="34" charset="-120"/>
+              </a:rPr>
+              <a:t>パートナーシップ</a:t>
+            </a:r>
+            <a:endParaRPr lang="en-US" sz="640" dirty="0"/>
+          </a:p>
+        </p:txBody>
+      </p:sp>
+      <p:sp>
+        <p:nvSpPr>
+          <p:cNvPr id="54" name="Text 52"/>
+          <p:cNvSpPr/>
+          <p:nvPr/>
+        </p:nvSpPr>
+        <p:spPr>
+          <a:xfrm>
+            <a:off x="14357271" y="8843063"/>
+            <a:ext cx="303047" cy="76233"/>
+          </a:xfrm>
+          <a:prstGeom prst="rect">
+            <a:avLst/>
+          </a:prstGeom>
+          <a:noFill/>
+          <a:ln/>
+        </p:spPr>
+        <p:txBody>
+          <a:bodyPr wrap="none" lIns="0" tIns="0" rIns="0" bIns="0" rtlCol="0" anchor="t"/>
+          <a:lstStyle/>
+          <a:p>
+            <a:pPr algn="l" indent="0" marL="0">
+              <a:lnSpc>
+                <a:spcPts val="600"/>
+              </a:lnSpc>
+              <a:buNone/>
+            </a:pPr>
+            <a:r>
+              <a:rPr lang="en-US" sz="540" spc="160" kern="0" dirty="0">
+                <a:solidFill>
+                  <a:srgbClr val="7D838A"/>
+                </a:solidFill>
+                <a:latin typeface="Inter Medium" pitchFamily="34" charset="0"/>
+                <a:ea typeface="Inter Medium" pitchFamily="34" charset="-122"/>
+                <a:cs typeface="Inter Medium" pitchFamily="34" charset="-120"/>
+              </a:rPr>
+              <a:t>P.09</a:t>
+            </a:r>
+            <a:endParaRPr lang="en-US" sz="540" dirty="0"/>
+          </a:p>
+        </p:txBody>
+      </p:sp>
+      <p:sp>
+        <p:nvSpPr>
+          <p:cNvPr id="55" name="Text 53"/>
+          <p:cNvSpPr/>
+          <p:nvPr/>
+        </p:nvSpPr>
+        <p:spPr>
+          <a:xfrm>
+            <a:off x="12260855" y="9109879"/>
+            <a:ext cx="173331" cy="101644"/>
+          </a:xfrm>
+          <a:prstGeom prst="rect">
+            <a:avLst/>
+          </a:prstGeom>
+          <a:noFill/>
+          <a:ln/>
+        </p:spPr>
+        <p:txBody>
+          <a:bodyPr wrap="none" lIns="0" tIns="0" rIns="0" bIns="0" rtlCol="0" anchor="t"/>
+          <a:lstStyle/>
+          <a:p>
+            <a:pPr algn="l" indent="0" marL="0">
+              <a:lnSpc>
+                <a:spcPts val="800"/>
+              </a:lnSpc>
+              <a:buNone/>
+            </a:pPr>
+            <a:r>
+              <a:rPr lang="en-US" sz="640" spc="30" kern="0" dirty="0">
+                <a:solidFill>
+                  <a:srgbClr val="9C7442"/>
+                </a:solidFill>
+                <a:latin typeface="Inter Medium" pitchFamily="34" charset="0"/>
+                <a:ea typeface="Inter Medium" pitchFamily="34" charset="-122"/>
+                <a:cs typeface="Inter Medium" pitchFamily="34" charset="-120"/>
+              </a:rPr>
+              <a:t>06</a:t>
+            </a:r>
+            <a:endParaRPr lang="en-US" sz="640" dirty="0"/>
+          </a:p>
+        </p:txBody>
+      </p:sp>
+      <p:sp>
+        <p:nvSpPr>
+          <p:cNvPr id="56" name="Text 54"/>
+          <p:cNvSpPr/>
+          <p:nvPr/>
+        </p:nvSpPr>
+        <p:spPr>
+          <a:xfrm>
+            <a:off x="12514966" y="9109879"/>
+            <a:ext cx="811646" cy="101644"/>
+          </a:xfrm>
+          <a:prstGeom prst="rect">
+            <a:avLst/>
+          </a:prstGeom>
+          <a:noFill/>
+          <a:ln/>
+        </p:spPr>
+        <p:txBody>
+          <a:bodyPr wrap="none" lIns="0" tIns="0" rIns="0" bIns="0" rtlCol="0" anchor="t"/>
+          <a:lstStyle/>
+          <a:p>
+            <a:pPr algn="l" indent="0" marL="0">
+              <a:lnSpc>
+                <a:spcPts val="800"/>
+              </a:lnSpc>
+              <a:buNone/>
+            </a:pPr>
+            <a:r>
+              <a:rPr lang="en-US" sz="640" spc="30" kern="0" dirty="0">
+                <a:solidFill>
+                  <a:srgbClr val="121519"/>
+                </a:solidFill>
+                <a:latin typeface="Noto Sans JP Medium" pitchFamily="34" charset="0"/>
+                <a:ea typeface="Noto Sans JP Medium" pitchFamily="34" charset="-122"/>
+                <a:cs typeface="Noto Sans JP Medium" pitchFamily="34" charset="-120"/>
+              </a:rPr>
+              <a:t>バリューチェーン</a:t>
+            </a:r>
+            <a:endParaRPr lang="en-US" sz="640" dirty="0"/>
+          </a:p>
+        </p:txBody>
+      </p:sp>
+      <p:sp>
+        <p:nvSpPr>
+          <p:cNvPr id="57" name="Text 55"/>
+          <p:cNvSpPr/>
+          <p:nvPr/>
+        </p:nvSpPr>
+        <p:spPr>
+          <a:xfrm>
+            <a:off x="14357271" y="9109879"/>
+            <a:ext cx="282301" cy="76233"/>
+          </a:xfrm>
+          <a:prstGeom prst="rect">
+            <a:avLst/>
+          </a:prstGeom>
+          <a:noFill/>
+          <a:ln/>
+        </p:spPr>
+        <p:txBody>
+          <a:bodyPr wrap="none" lIns="0" tIns="0" rIns="0" bIns="0" rtlCol="0" anchor="t"/>
+          <a:lstStyle/>
+          <a:p>
+            <a:pPr algn="l" indent="0" marL="0">
+              <a:lnSpc>
+                <a:spcPts val="600"/>
+              </a:lnSpc>
+              <a:buNone/>
+            </a:pPr>
+            <a:r>
+              <a:rPr lang="en-US" sz="540" spc="160" kern="0" dirty="0">
+                <a:solidFill>
+                  <a:srgbClr val="7D838A"/>
+                </a:solidFill>
+                <a:latin typeface="Inter Medium" pitchFamily="34" charset="0"/>
+                <a:ea typeface="Inter Medium" pitchFamily="34" charset="-122"/>
+                <a:cs typeface="Inter Medium" pitchFamily="34" charset="-120"/>
+              </a:rPr>
+              <a:t>P.10</a:t>
+            </a:r>
+            <a:endParaRPr lang="en-US" sz="540" dirty="0"/>
+          </a:p>
+        </p:txBody>
+      </p:sp>
+      <p:sp>
+        <p:nvSpPr>
+          <p:cNvPr id="58" name="Text 56"/>
+          <p:cNvSpPr/>
+          <p:nvPr/>
+        </p:nvSpPr>
+        <p:spPr>
+          <a:xfrm>
+            <a:off x="508222" y="10316906"/>
+            <a:ext cx="201502" cy="88939"/>
+          </a:xfrm>
+          <a:prstGeom prst="rect">
+            <a:avLst/>
+          </a:prstGeom>
+          <a:noFill/>
+          <a:ln/>
+        </p:spPr>
+        <p:txBody>
+          <a:bodyPr wrap="none" lIns="0" tIns="0" rIns="0" bIns="0" rtlCol="0" anchor="t"/>
+          <a:lstStyle/>
+          <a:p>
+            <a:pPr algn="l" indent="0" marL="0">
+              <a:lnSpc>
+                <a:spcPts val="700"/>
+              </a:lnSpc>
+              <a:buNone/>
+            </a:pPr>
+            <a:r>
+              <a:rPr lang="en-US" sz="600" spc="160" kern="0" dirty="0">
+                <a:solidFill>
+                  <a:srgbClr val="7D838A"/>
+                </a:solidFill>
+                <a:latin typeface="Inter Medium" pitchFamily="34" charset="0"/>
+                <a:ea typeface="Inter Medium" pitchFamily="34" charset="-122"/>
+                <a:cs typeface="Inter Medium" pitchFamily="34" charset="-120"/>
+              </a:rPr>
+              <a:t>02</a:t>
+            </a:r>
+            <a:endParaRPr lang="en-US" sz="600" dirty="0"/>
+          </a:p>
+        </p:txBody>
+      </p:sp>
+      <p:sp>
+        <p:nvSpPr>
+          <p:cNvPr id="59" name="Text 57"/>
+          <p:cNvSpPr/>
+          <p:nvPr/>
+        </p:nvSpPr>
+        <p:spPr>
+          <a:xfrm>
+            <a:off x="14458915" y="10316906"/>
+            <a:ext cx="202376" cy="88939"/>
+          </a:xfrm>
+          <a:prstGeom prst="rect">
+            <a:avLst/>
+          </a:prstGeom>
+          <a:noFill/>
+          <a:ln/>
+        </p:spPr>
+        <p:txBody>
+          <a:bodyPr wrap="none" lIns="0" tIns="0" rIns="0" bIns="0" rtlCol="0" anchor="t"/>
+          <a:lstStyle/>
+          <a:p>
+            <a:pPr algn="l" indent="0" marL="0">
+              <a:lnSpc>
+                <a:spcPts val="700"/>
+              </a:lnSpc>
+              <a:buNone/>
+            </a:pPr>
+            <a:r>
+              <a:rPr lang="en-US" sz="600" spc="160" kern="0" dirty="0">
+                <a:solidFill>
+                  <a:srgbClr val="7D838A"/>
+                </a:solidFill>
+                <a:latin typeface="Inter Medium" pitchFamily="34" charset="0"/>
+                <a:ea typeface="Inter Medium" pitchFamily="34" charset="-122"/>
+                <a:cs typeface="Inter Medium" pitchFamily="34" charset="-120"/>
+              </a:rPr>
+              <a:t>03</a:t>
+            </a:r>
+            <a:endParaRPr lang="en-US" sz="600" dirty="0"/>
+          </a:p>
+        </p:txBody>
+      </p:sp>
+      <p:sp>
+        <p:nvSpPr>
+          <p:cNvPr id="60" name="Text 58"/>
+          <p:cNvSpPr/>
+          <p:nvPr/>
+        </p:nvSpPr>
+        <p:spPr>
+          <a:xfrm>
+            <a:off x="876683" y="10328977"/>
+            <a:ext cx="6501450" cy="102915"/>
+          </a:xfrm>
+          <a:prstGeom prst="rect">
+            <a:avLst/>
+          </a:prstGeom>
+          <a:noFill/>
+          <a:ln/>
+        </p:spPr>
+        <p:txBody>
+          <a:bodyPr wrap="none" lIns="0" tIns="0" rIns="0" bIns="0" rtlCol="0" anchor="t"/>
+          <a:lstStyle/>
+          <a:p>
+            <a:pPr algn="l" indent="0" marL="0">
+              <a:lnSpc>
+                <a:spcPts val="810"/>
+              </a:lnSpc>
+              <a:buNone/>
+            </a:pPr>
+            <a:r>
+              <a:rPr lang="en-US" sz="540" dirty="0">
+                <a:solidFill>
+                  <a:srgbClr val="A3A8AE"/>
                 </a:solidFill>
                 <a:latin typeface="Noto Sans JP" pitchFamily="34" charset="0"/>
                 <a:ea typeface="Noto Sans JP" pitchFamily="34" charset="-122"/>
                 <a:cs typeface="Noto Sans JP" pitchFamily="34" charset="-120"/>
               </a:rPr>
-              <a:t>コアメッセージ</a:t>
-            </a:r>
-            <a:endParaRPr lang="en-US" sz="660" dirty="0"/>
-          </a:p>
-        </p:txBody>
-      </p:sp>
-      <p:sp>
-        <p:nvSpPr>
-          <p:cNvPr id="37" name="Text 35"/>
-          <p:cNvSpPr/>
-          <p:nvPr/>
-        </p:nvSpPr>
-        <p:spPr>
-          <a:xfrm>
-            <a:off x="8068024" y="5964620"/>
-            <a:ext cx="4628652" cy="1120629"/>
-          </a:xfrm>
-          <a:prstGeom prst="rect">
-            <a:avLst/>
-          </a:prstGeom>
-          <a:noFill/>
-          <a:ln/>
-        </p:spPr>
-        <p:txBody>
-          <a:bodyPr wrap="none" lIns="0" tIns="0" rIns="0" bIns="0" rtlCol="0" anchor="t"/>
-          <a:lstStyle/>
-          <a:p>
-            <a:pPr algn="l" indent="0" marL="0">
-              <a:lnSpc>
-                <a:spcPts val="4410"/>
-              </a:lnSpc>
-              <a:buNone/>
-            </a:pPr>
-            <a:r>
-              <a:rPr lang="en-US" sz="4200" spc="-84" kern="0" dirty="0">
-                <a:solidFill>
-                  <a:srgbClr val="121519"/>
-                </a:solidFill>
-                <a:latin typeface="Inter Tight Light" pitchFamily="34" charset="0"/>
-                <a:ea typeface="Inter Tight Light" pitchFamily="34" charset="-122"/>
-                <a:cs typeface="Inter Tight Light" pitchFamily="34" charset="-120"/>
-              </a:rPr>
-              <a:t>Strength to Hold.</a:t>
-            </a:r>
-            <a:endParaRPr lang="en-US" sz="4200" dirty="0"/>
-          </a:p>
-          <a:p>
-            <a:pPr algn="l" indent="0" marL="0">
-              <a:lnSpc>
-                <a:spcPts val="4410"/>
-              </a:lnSpc>
-              <a:buNone/>
-            </a:pPr>
-            <a:r>
-              <a:rPr lang="en-US" sz="4200" spc="-84" kern="0" dirty="0">
-                <a:solidFill>
-                  <a:srgbClr val="121519"/>
-                </a:solidFill>
-                <a:latin typeface="Inter Tight Light" pitchFamily="34" charset="0"/>
-                <a:ea typeface="Inter Tight Light" pitchFamily="34" charset="-122"/>
-                <a:cs typeface="Inter Tight Light" pitchFamily="34" charset="-120"/>
-              </a:rPr>
-              <a:t>Power to Connect.</a:t>
-            </a:r>
-            <a:endParaRPr lang="en-US" sz="4200" dirty="0"/>
-          </a:p>
-        </p:txBody>
-      </p:sp>
-      <p:sp>
-        <p:nvSpPr>
-          <p:cNvPr id="38" name="Text 36"/>
-          <p:cNvSpPr/>
-          <p:nvPr/>
-        </p:nvSpPr>
-        <p:spPr>
-          <a:xfrm>
-            <a:off x="8068024" y="7188165"/>
-            <a:ext cx="1930390" cy="247758"/>
-          </a:xfrm>
-          <a:prstGeom prst="rect">
-            <a:avLst/>
-          </a:prstGeom>
-          <a:noFill/>
-          <a:ln/>
-        </p:spPr>
-        <p:txBody>
-          <a:bodyPr wrap="none" lIns="0" tIns="0" rIns="0" bIns="0" rtlCol="0" anchor="t"/>
-          <a:lstStyle/>
-          <a:p>
-            <a:pPr algn="l" indent="0" marL="0">
-              <a:lnSpc>
-                <a:spcPts val="1950"/>
-              </a:lnSpc>
-              <a:buNone/>
-            </a:pPr>
-            <a:r>
-              <a:rPr lang="en-US" sz="1300" spc="50" kern="0" dirty="0">
-                <a:solidFill>
-                  <a:srgbClr val="121519"/>
-                </a:solidFill>
-                <a:latin typeface="Noto Sans JP Medium" pitchFamily="34" charset="0"/>
-                <a:ea typeface="Noto Sans JP Medium" pitchFamily="34" charset="-122"/>
-                <a:cs typeface="Noto Sans JP Medium" pitchFamily="34" charset="-120"/>
-              </a:rPr>
-              <a:t>持つ力と、つなぐ力。</a:t>
-            </a:r>
-            <a:endParaRPr lang="en-US" sz="1300" dirty="0"/>
-          </a:p>
-        </p:txBody>
-      </p:sp>
-      <p:sp>
-        <p:nvSpPr>
-          <p:cNvPr id="39" name="Text 37"/>
-          <p:cNvSpPr/>
-          <p:nvPr/>
-        </p:nvSpPr>
-        <p:spPr>
-          <a:xfrm>
-            <a:off x="8068024" y="7488365"/>
-            <a:ext cx="4243654" cy="904953"/>
-          </a:xfrm>
-          <a:prstGeom prst="rect">
-            <a:avLst/>
-          </a:prstGeom>
-          <a:noFill/>
-          <a:ln/>
-        </p:spPr>
-        <p:txBody>
-          <a:bodyPr wrap="none" lIns="0" tIns="0" rIns="0" bIns="0" rtlCol="0" anchor="t"/>
-          <a:lstStyle/>
-          <a:p>
-            <a:pPr algn="l" indent="0" marL="0">
-              <a:lnSpc>
-                <a:spcPts val="1425"/>
-              </a:lnSpc>
-              <a:buNone/>
-            </a:pPr>
-            <a:r>
-              <a:rPr lang="en-US" sz="770" spc="20" kern="0" dirty="0">
-                <a:solidFill>
-                  <a:srgbClr val="3D4249"/>
-                </a:solidFill>
-                <a:latin typeface="Noto Sans JP" pitchFamily="34" charset="0"/>
-                <a:ea typeface="Noto Sans JP" pitchFamily="34" charset="-122"/>
-                <a:cs typeface="Noto Sans JP" pitchFamily="34" charset="-120"/>
-              </a:rPr>
-              <a:t>資源は、そこに「ある」だけでは、まだ価値ではありません。誰かが見出し、育て、</a:t>
-            </a:r>
-            <a:endParaRPr lang="en-US" sz="770" dirty="0"/>
-          </a:p>
-          <a:p>
-            <a:pPr algn="l" indent="0" marL="0">
-              <a:lnSpc>
-                <a:spcPts val="1425"/>
-              </a:lnSpc>
-              <a:buNone/>
-            </a:pPr>
-            <a:r>
-              <a:rPr lang="en-US" sz="770" spc="20" kern="0" dirty="0">
-                <a:solidFill>
-                  <a:srgbClr val="3D4249"/>
-                </a:solidFill>
-                <a:latin typeface="Noto Sans JP" pitchFamily="34" charset="0"/>
-                <a:ea typeface="Noto Sans JP" pitchFamily="34" charset="-122"/>
-                <a:cs typeface="Noto Sans JP" pitchFamily="34" charset="-120"/>
-              </a:rPr>
-              <a:t>必要とする場所へ届けて、はじめて力になる。私たちは、世界有数の資産に関わり、</a:t>
-            </a:r>
-            <a:endParaRPr lang="en-US" sz="770" dirty="0"/>
-          </a:p>
-          <a:p>
-            <a:pPr algn="l" indent="0" marL="0">
-              <a:lnSpc>
-                <a:spcPts val="1425"/>
-              </a:lnSpc>
-              <a:buNone/>
-            </a:pPr>
-            <a:r>
-              <a:rPr lang="en-US" sz="770" spc="20" kern="0" dirty="0">
-                <a:solidFill>
-                  <a:srgbClr val="3D4249"/>
-                </a:solidFill>
-                <a:latin typeface="Noto Sans JP" pitchFamily="34" charset="0"/>
-                <a:ea typeface="Noto Sans JP" pitchFamily="34" charset="-122"/>
-                <a:cs typeface="Noto Sans JP" pitchFamily="34" charset="-120"/>
-              </a:rPr>
-              <a:t>投資とトレーディングの両輪で川上から川下までをつなぎます。フェアな立場だから</a:t>
-            </a:r>
-            <a:endParaRPr lang="en-US" sz="770" dirty="0"/>
-          </a:p>
-          <a:p>
-            <a:pPr algn="l" indent="0" marL="0">
-              <a:lnSpc>
-                <a:spcPts val="1425"/>
-              </a:lnSpc>
-              <a:buNone/>
-            </a:pPr>
-            <a:r>
-              <a:rPr lang="en-US" sz="770" spc="20" kern="0" dirty="0">
-                <a:solidFill>
-                  <a:srgbClr val="3D4249"/>
-                </a:solidFill>
-                <a:latin typeface="Noto Sans JP" pitchFamily="34" charset="0"/>
-                <a:ea typeface="Noto Sans JP" pitchFamily="34" charset="-122"/>
-                <a:cs typeface="Noto Sans JP" pitchFamily="34" charset="-120"/>
-              </a:rPr>
-              <a:t>こそ、埋められる隙間がある。多様なパートナーと使い手の間に立ち、その時々の最</a:t>
-            </a:r>
-            <a:endParaRPr lang="en-US" sz="770" dirty="0"/>
-          </a:p>
-          <a:p>
-            <a:pPr algn="l" indent="0" marL="0">
-              <a:lnSpc>
-                <a:spcPts val="1425"/>
-              </a:lnSpc>
-              <a:buNone/>
-            </a:pPr>
-            <a:r>
-              <a:rPr lang="en-US" sz="770" spc="20" kern="0" dirty="0">
-                <a:solidFill>
-                  <a:srgbClr val="3D4249"/>
-                </a:solidFill>
-                <a:latin typeface="Noto Sans JP" pitchFamily="34" charset="0"/>
-                <a:ea typeface="Noto Sans JP" pitchFamily="34" charset="-122"/>
-                <a:cs typeface="Noto Sans JP" pitchFamily="34" charset="-120"/>
-              </a:rPr>
-              <a:t>適解を導く。世界に眠る価値を、社会の力へ。</a:t>
-            </a:r>
-            <a:endParaRPr lang="en-US" sz="770" dirty="0"/>
-          </a:p>
-        </p:txBody>
-      </p:sp>
-      <p:sp>
-        <p:nvSpPr>
-          <p:cNvPr id="40" name="Text 38"/>
-          <p:cNvSpPr/>
-          <p:nvPr/>
-        </p:nvSpPr>
-        <p:spPr>
-          <a:xfrm>
-            <a:off x="12260855" y="7496274"/>
-            <a:ext cx="288416" cy="101644"/>
-          </a:xfrm>
-          <a:prstGeom prst="rect">
-            <a:avLst/>
-          </a:prstGeom>
-          <a:noFill/>
-          <a:ln/>
-        </p:spPr>
-        <p:txBody>
-          <a:bodyPr wrap="none" lIns="0" tIns="0" rIns="0" bIns="0" rtlCol="0" anchor="t"/>
-          <a:lstStyle/>
-          <a:p>
-            <a:pPr algn="l" indent="0" marL="0">
-              <a:lnSpc>
-                <a:spcPts val="800"/>
-              </a:lnSpc>
-              <a:buNone/>
-            </a:pPr>
-            <a:r>
-              <a:rPr lang="en-US" sz="660" spc="190" kern="0" dirty="0">
-                <a:solidFill>
-                  <a:srgbClr val="9C7442"/>
-                </a:solidFill>
-                <a:latin typeface="Noto Sans JP Medium" pitchFamily="34" charset="0"/>
-                <a:ea typeface="Noto Sans JP Medium" pitchFamily="34" charset="-122"/>
-                <a:cs typeface="Noto Sans JP Medium" pitchFamily="34" charset="-120"/>
-              </a:rPr>
-              <a:t>目次</a:t>
-            </a:r>
-            <a:endParaRPr lang="en-US" sz="660" dirty="0"/>
-          </a:p>
-        </p:txBody>
-      </p:sp>
-      <p:sp>
-        <p:nvSpPr>
-          <p:cNvPr id="41" name="Text 39"/>
-          <p:cNvSpPr/>
-          <p:nvPr/>
-        </p:nvSpPr>
-        <p:spPr>
-          <a:xfrm>
-            <a:off x="12260855" y="7775796"/>
-            <a:ext cx="154114" cy="101644"/>
-          </a:xfrm>
-          <a:prstGeom prst="rect">
-            <a:avLst/>
-          </a:prstGeom>
-          <a:noFill/>
-          <a:ln/>
-        </p:spPr>
-        <p:txBody>
-          <a:bodyPr wrap="none" lIns="0" tIns="0" rIns="0" bIns="0" rtlCol="0" anchor="t"/>
-          <a:lstStyle/>
-          <a:p>
-            <a:pPr algn="l" indent="0" marL="0">
-              <a:lnSpc>
-                <a:spcPts val="800"/>
-              </a:lnSpc>
-              <a:buNone/>
-            </a:pPr>
-            <a:r>
-              <a:rPr lang="en-US" sz="640" spc="30" kern="0" dirty="0">
-                <a:solidFill>
-                  <a:srgbClr val="9C7442"/>
-                </a:solidFill>
-                <a:latin typeface="Inter Medium" pitchFamily="34" charset="0"/>
-                <a:ea typeface="Inter Medium" pitchFamily="34" charset="-122"/>
-                <a:cs typeface="Inter Medium" pitchFamily="34" charset="-120"/>
-              </a:rPr>
-              <a:t>01</a:t>
-            </a:r>
-            <a:endParaRPr lang="en-US" sz="640" dirty="0"/>
-          </a:p>
-        </p:txBody>
-      </p:sp>
-      <p:sp>
-        <p:nvSpPr>
-          <p:cNvPr id="42" name="Text 40"/>
-          <p:cNvSpPr/>
-          <p:nvPr/>
-        </p:nvSpPr>
-        <p:spPr>
-          <a:xfrm>
-            <a:off x="12514966" y="7775796"/>
-            <a:ext cx="616199" cy="101644"/>
-          </a:xfrm>
-          <a:prstGeom prst="rect">
-            <a:avLst/>
-          </a:prstGeom>
-          <a:noFill/>
-          <a:ln/>
-        </p:spPr>
-        <p:txBody>
-          <a:bodyPr wrap="none" lIns="0" tIns="0" rIns="0" bIns="0" rtlCol="0" anchor="t"/>
-          <a:lstStyle/>
-          <a:p>
-            <a:pPr algn="l" indent="0" marL="0">
-              <a:lnSpc>
-                <a:spcPts val="800"/>
-              </a:lnSpc>
-              <a:buNone/>
-            </a:pPr>
-            <a:r>
-              <a:rPr lang="en-US" sz="640" spc="30" kern="0" dirty="0">
-                <a:solidFill>
-                  <a:srgbClr val="121519"/>
-                </a:solidFill>
-                <a:latin typeface="Noto Sans JP Medium" pitchFamily="34" charset="0"/>
-                <a:ea typeface="Noto Sans JP Medium" pitchFamily="34" charset="-122"/>
-                <a:cs typeface="Noto Sans JP Medium" pitchFamily="34" charset="-120"/>
-              </a:rPr>
-              <a:t>我々は何者か</a:t>
-            </a:r>
-            <a:endParaRPr lang="en-US" sz="640" dirty="0"/>
-          </a:p>
-        </p:txBody>
-      </p:sp>
-      <p:sp>
-        <p:nvSpPr>
-          <p:cNvPr id="43" name="Text 41"/>
-          <p:cNvSpPr/>
-          <p:nvPr/>
-        </p:nvSpPr>
-        <p:spPr>
-          <a:xfrm>
-            <a:off x="14357271" y="7775796"/>
-            <a:ext cx="305013" cy="76233"/>
-          </a:xfrm>
-          <a:prstGeom prst="rect">
-            <a:avLst/>
-          </a:prstGeom>
-          <a:noFill/>
-          <a:ln/>
-        </p:spPr>
-        <p:txBody>
-          <a:bodyPr wrap="none" lIns="0" tIns="0" rIns="0" bIns="0" rtlCol="0" anchor="t"/>
-          <a:lstStyle/>
-          <a:p>
-            <a:pPr algn="l" indent="0" marL="0">
-              <a:lnSpc>
-                <a:spcPts val="600"/>
-              </a:lnSpc>
-              <a:buNone/>
-            </a:pPr>
-            <a:r>
-              <a:rPr lang="en-US" sz="540" spc="160" kern="0" dirty="0">
-                <a:solidFill>
-                  <a:srgbClr val="7D838A"/>
-                </a:solidFill>
-                <a:latin typeface="Inter Medium" pitchFamily="34" charset="0"/>
-                <a:ea typeface="Inter Medium" pitchFamily="34" charset="-122"/>
-                <a:cs typeface="Inter Medium" pitchFamily="34" charset="-120"/>
-              </a:rPr>
-              <a:t>P.04</a:t>
+              <a:t>台割メモ｜動画01 OPENING。地球儀は使わず、暮らしと金属の写真を見開きで1枚のモザイクに（左＝暮らし、右＝それを支える金属）。キャッチコピー＋需要と供給のギャップを概念図で。</a:t>
             </a:r>
             <a:endParaRPr lang="en-US" sz="540" dirty="0"/>
           </a:p>
@@ -3204,763 +3918,7 @@
       </p:sp>
       <p:sp>
         <p:nvSpPr>
-          <p:cNvPr id="44" name="Text 42"/>
-          <p:cNvSpPr/>
-          <p:nvPr/>
-        </p:nvSpPr>
-        <p:spPr>
-          <a:xfrm>
-            <a:off x="12260855" y="8042613"/>
-            <a:ext cx="172021" cy="101644"/>
-          </a:xfrm>
-          <a:prstGeom prst="rect">
-            <a:avLst/>
-          </a:prstGeom>
-          <a:noFill/>
-          <a:ln/>
-        </p:spPr>
-        <p:txBody>
-          <a:bodyPr wrap="none" lIns="0" tIns="0" rIns="0" bIns="0" rtlCol="0" anchor="t"/>
-          <a:lstStyle/>
-          <a:p>
-            <a:pPr algn="l" indent="0" marL="0">
-              <a:lnSpc>
-                <a:spcPts val="800"/>
-              </a:lnSpc>
-              <a:buNone/>
-            </a:pPr>
-            <a:r>
-              <a:rPr lang="en-US" sz="640" spc="30" kern="0" dirty="0">
-                <a:solidFill>
-                  <a:srgbClr val="9C7442"/>
-                </a:solidFill>
-                <a:latin typeface="Inter Medium" pitchFamily="34" charset="0"/>
-                <a:ea typeface="Inter Medium" pitchFamily="34" charset="-122"/>
-                <a:cs typeface="Inter Medium" pitchFamily="34" charset="-120"/>
-              </a:rPr>
-              <a:t>02</a:t>
-            </a:r>
-            <a:endParaRPr lang="en-US" sz="640" dirty="0"/>
-          </a:p>
-        </p:txBody>
-      </p:sp>
-      <p:sp>
-        <p:nvSpPr>
-          <p:cNvPr id="45" name="Text 43"/>
-          <p:cNvSpPr/>
-          <p:nvPr/>
-        </p:nvSpPr>
-        <p:spPr>
-          <a:xfrm>
-            <a:off x="12514966" y="8042613"/>
-            <a:ext cx="522734" cy="101644"/>
-          </a:xfrm>
-          <a:prstGeom prst="rect">
-            <a:avLst/>
-          </a:prstGeom>
-          <a:noFill/>
-          <a:ln/>
-        </p:spPr>
-        <p:txBody>
-          <a:bodyPr wrap="none" lIns="0" tIns="0" rIns="0" bIns="0" rtlCol="0" anchor="t"/>
-          <a:lstStyle/>
-          <a:p>
-            <a:pPr algn="l" indent="0" marL="0">
-              <a:lnSpc>
-                <a:spcPts val="800"/>
-              </a:lnSpc>
-              <a:buNone/>
-            </a:pPr>
-            <a:r>
-              <a:rPr lang="en-US" sz="640" spc="30" kern="0" dirty="0">
-                <a:solidFill>
-                  <a:srgbClr val="121519"/>
-                </a:solidFill>
-                <a:latin typeface="Noto Sans JP Medium" pitchFamily="34" charset="0"/>
-                <a:ea typeface="Noto Sans JP Medium" pitchFamily="34" charset="-122"/>
-                <a:cs typeface="Noto Sans JP Medium" pitchFamily="34" charset="-120"/>
-              </a:rPr>
-              <a:t>資産の強み</a:t>
-            </a:r>
-            <a:endParaRPr lang="en-US" sz="640" dirty="0"/>
-          </a:p>
-        </p:txBody>
-      </p:sp>
-      <p:sp>
-        <p:nvSpPr>
-          <p:cNvPr id="46" name="Text 44"/>
-          <p:cNvSpPr/>
-          <p:nvPr/>
-        </p:nvSpPr>
-        <p:spPr>
-          <a:xfrm>
-            <a:off x="14357271" y="8042613"/>
-            <a:ext cx="301082" cy="76233"/>
-          </a:xfrm>
-          <a:prstGeom prst="rect">
-            <a:avLst/>
-          </a:prstGeom>
-          <a:noFill/>
-          <a:ln/>
-        </p:spPr>
-        <p:txBody>
-          <a:bodyPr wrap="none" lIns="0" tIns="0" rIns="0" bIns="0" rtlCol="0" anchor="t"/>
-          <a:lstStyle/>
-          <a:p>
-            <a:pPr algn="l" indent="0" marL="0">
-              <a:lnSpc>
-                <a:spcPts val="600"/>
-              </a:lnSpc>
-              <a:buNone/>
-            </a:pPr>
-            <a:r>
-              <a:rPr lang="en-US" sz="540" spc="160" kern="0" dirty="0">
-                <a:solidFill>
-                  <a:srgbClr val="7D838A"/>
-                </a:solidFill>
-                <a:latin typeface="Inter Medium" pitchFamily="34" charset="0"/>
-                <a:ea typeface="Inter Medium" pitchFamily="34" charset="-122"/>
-                <a:cs typeface="Inter Medium" pitchFamily="34" charset="-120"/>
-              </a:rPr>
-              <a:t>P.05</a:t>
-            </a:r>
-            <a:endParaRPr lang="en-US" sz="540" dirty="0"/>
-          </a:p>
-        </p:txBody>
-      </p:sp>
-      <p:sp>
-        <p:nvSpPr>
-          <p:cNvPr id="47" name="Text 45"/>
-          <p:cNvSpPr/>
-          <p:nvPr/>
-        </p:nvSpPr>
-        <p:spPr>
-          <a:xfrm>
-            <a:off x="12260855" y="8309429"/>
-            <a:ext cx="172895" cy="101644"/>
-          </a:xfrm>
-          <a:prstGeom prst="rect">
-            <a:avLst/>
-          </a:prstGeom>
-          <a:noFill/>
-          <a:ln/>
-        </p:spPr>
-        <p:txBody>
-          <a:bodyPr wrap="none" lIns="0" tIns="0" rIns="0" bIns="0" rtlCol="0" anchor="t"/>
-          <a:lstStyle/>
-          <a:p>
-            <a:pPr algn="l" indent="0" marL="0">
-              <a:lnSpc>
-                <a:spcPts val="800"/>
-              </a:lnSpc>
-              <a:buNone/>
-            </a:pPr>
-            <a:r>
-              <a:rPr lang="en-US" sz="640" spc="30" kern="0" dirty="0">
-                <a:solidFill>
-                  <a:srgbClr val="9C7442"/>
-                </a:solidFill>
-                <a:latin typeface="Inter Medium" pitchFamily="34" charset="0"/>
-                <a:ea typeface="Inter Medium" pitchFamily="34" charset="-122"/>
-                <a:cs typeface="Inter Medium" pitchFamily="34" charset="-120"/>
-              </a:rPr>
-              <a:t>03</a:t>
-            </a:r>
-            <a:endParaRPr lang="en-US" sz="640" dirty="0"/>
-          </a:p>
-        </p:txBody>
-      </p:sp>
-      <p:sp>
-        <p:nvSpPr>
-          <p:cNvPr id="48" name="Text 46"/>
-          <p:cNvSpPr/>
-          <p:nvPr/>
-        </p:nvSpPr>
-        <p:spPr>
-          <a:xfrm>
-            <a:off x="12514966" y="8309429"/>
-            <a:ext cx="520550" cy="101644"/>
-          </a:xfrm>
-          <a:prstGeom prst="rect">
-            <a:avLst/>
-          </a:prstGeom>
-          <a:noFill/>
-          <a:ln/>
-        </p:spPr>
-        <p:txBody>
-          <a:bodyPr wrap="none" lIns="0" tIns="0" rIns="0" bIns="0" rtlCol="0" anchor="t"/>
-          <a:lstStyle/>
-          <a:p>
-            <a:pPr algn="l" indent="0" marL="0">
-              <a:lnSpc>
-                <a:spcPts val="800"/>
-              </a:lnSpc>
-              <a:buNone/>
-            </a:pPr>
-            <a:r>
-              <a:rPr lang="en-US" sz="640" spc="30" kern="0" dirty="0">
-                <a:solidFill>
-                  <a:srgbClr val="121519"/>
-                </a:solidFill>
-                <a:latin typeface="Noto Sans JP Medium" pitchFamily="34" charset="0"/>
-                <a:ea typeface="Noto Sans JP Medium" pitchFamily="34" charset="-122"/>
-                <a:cs typeface="Noto Sans JP Medium" pitchFamily="34" charset="-120"/>
-              </a:rPr>
-              <a:t>原料炭と銅</a:t>
-            </a:r>
-            <a:endParaRPr lang="en-US" sz="640" dirty="0"/>
-          </a:p>
-        </p:txBody>
-      </p:sp>
-      <p:sp>
-        <p:nvSpPr>
-          <p:cNvPr id="49" name="Text 47"/>
-          <p:cNvSpPr/>
-          <p:nvPr/>
-        </p:nvSpPr>
-        <p:spPr>
-          <a:xfrm>
-            <a:off x="14357271" y="8309429"/>
-            <a:ext cx="303047" cy="76233"/>
-          </a:xfrm>
-          <a:prstGeom prst="rect">
-            <a:avLst/>
-          </a:prstGeom>
-          <a:noFill/>
-          <a:ln/>
-        </p:spPr>
-        <p:txBody>
-          <a:bodyPr wrap="none" lIns="0" tIns="0" rIns="0" bIns="0" rtlCol="0" anchor="t"/>
-          <a:lstStyle/>
-          <a:p>
-            <a:pPr algn="l" indent="0" marL="0">
-              <a:lnSpc>
-                <a:spcPts val="600"/>
-              </a:lnSpc>
-              <a:buNone/>
-            </a:pPr>
-            <a:r>
-              <a:rPr lang="en-US" sz="540" spc="160" kern="0" dirty="0">
-                <a:solidFill>
-                  <a:srgbClr val="7D838A"/>
-                </a:solidFill>
-                <a:latin typeface="Inter Medium" pitchFamily="34" charset="0"/>
-                <a:ea typeface="Inter Medium" pitchFamily="34" charset="-122"/>
-                <a:cs typeface="Inter Medium" pitchFamily="34" charset="-120"/>
-              </a:rPr>
-              <a:t>P.06</a:t>
-            </a:r>
-            <a:endParaRPr lang="en-US" sz="540" dirty="0"/>
-          </a:p>
-        </p:txBody>
-      </p:sp>
-      <p:sp>
-        <p:nvSpPr>
-          <p:cNvPr id="50" name="Text 48"/>
-          <p:cNvSpPr/>
-          <p:nvPr/>
-        </p:nvSpPr>
-        <p:spPr>
-          <a:xfrm>
-            <a:off x="12260855" y="8576246"/>
-            <a:ext cx="175515" cy="101644"/>
-          </a:xfrm>
-          <a:prstGeom prst="rect">
-            <a:avLst/>
-          </a:prstGeom>
-          <a:noFill/>
-          <a:ln/>
-        </p:spPr>
-        <p:txBody>
-          <a:bodyPr wrap="none" lIns="0" tIns="0" rIns="0" bIns="0" rtlCol="0" anchor="t"/>
-          <a:lstStyle/>
-          <a:p>
-            <a:pPr algn="l" indent="0" marL="0">
-              <a:lnSpc>
-                <a:spcPts val="800"/>
-              </a:lnSpc>
-              <a:buNone/>
-            </a:pPr>
-            <a:r>
-              <a:rPr lang="en-US" sz="640" spc="30" kern="0" dirty="0">
-                <a:solidFill>
-                  <a:srgbClr val="9C7442"/>
-                </a:solidFill>
-                <a:latin typeface="Inter Medium" pitchFamily="34" charset="0"/>
-                <a:ea typeface="Inter Medium" pitchFamily="34" charset="-122"/>
-                <a:cs typeface="Inter Medium" pitchFamily="34" charset="-120"/>
-              </a:rPr>
-              <a:t>04</a:t>
-            </a:r>
-            <a:endParaRPr lang="en-US" sz="640" dirty="0"/>
-          </a:p>
-        </p:txBody>
-      </p:sp>
-      <p:sp>
-        <p:nvSpPr>
-          <p:cNvPr id="51" name="Text 49"/>
-          <p:cNvSpPr/>
-          <p:nvPr/>
-        </p:nvSpPr>
-        <p:spPr>
-          <a:xfrm>
-            <a:off x="12514966" y="8576246"/>
-            <a:ext cx="711848" cy="101644"/>
-          </a:xfrm>
-          <a:prstGeom prst="rect">
-            <a:avLst/>
-          </a:prstGeom>
-          <a:noFill/>
-          <a:ln/>
-        </p:spPr>
-        <p:txBody>
-          <a:bodyPr wrap="none" lIns="0" tIns="0" rIns="0" bIns="0" rtlCol="0" anchor="t"/>
-          <a:lstStyle/>
-          <a:p>
-            <a:pPr algn="l" indent="0" marL="0">
-              <a:lnSpc>
-                <a:spcPts val="800"/>
-              </a:lnSpc>
-              <a:buNone/>
-            </a:pPr>
-            <a:r>
-              <a:rPr lang="en-US" sz="640" spc="30" kern="0" dirty="0">
-                <a:solidFill>
-                  <a:srgbClr val="121519"/>
-                </a:solidFill>
-                <a:latin typeface="Noto Sans JP Medium" pitchFamily="34" charset="0"/>
-                <a:ea typeface="Noto Sans JP Medium" pitchFamily="34" charset="-122"/>
-                <a:cs typeface="Noto Sans JP Medium" pitchFamily="34" charset="-120"/>
-              </a:rPr>
-              <a:t>資源から価値へ</a:t>
-            </a:r>
-            <a:endParaRPr lang="en-US" sz="640" dirty="0"/>
-          </a:p>
-        </p:txBody>
-      </p:sp>
-      <p:sp>
-        <p:nvSpPr>
-          <p:cNvPr id="52" name="Text 50"/>
-          <p:cNvSpPr/>
-          <p:nvPr/>
-        </p:nvSpPr>
-        <p:spPr>
-          <a:xfrm>
-            <a:off x="14357271" y="8576246"/>
-            <a:ext cx="303047" cy="76233"/>
-          </a:xfrm>
-          <a:prstGeom prst="rect">
-            <a:avLst/>
-          </a:prstGeom>
-          <a:noFill/>
-          <a:ln/>
-        </p:spPr>
-        <p:txBody>
-          <a:bodyPr wrap="none" lIns="0" tIns="0" rIns="0" bIns="0" rtlCol="0" anchor="t"/>
-          <a:lstStyle/>
-          <a:p>
-            <a:pPr algn="l" indent="0" marL="0">
-              <a:lnSpc>
-                <a:spcPts val="600"/>
-              </a:lnSpc>
-              <a:buNone/>
-            </a:pPr>
-            <a:r>
-              <a:rPr lang="en-US" sz="540" spc="160" kern="0" dirty="0">
-                <a:solidFill>
-                  <a:srgbClr val="7D838A"/>
-                </a:solidFill>
-                <a:latin typeface="Inter Medium" pitchFamily="34" charset="0"/>
-                <a:ea typeface="Inter Medium" pitchFamily="34" charset="-122"/>
-                <a:cs typeface="Inter Medium" pitchFamily="34" charset="-120"/>
-              </a:rPr>
-              <a:t>P.08</a:t>
-            </a:r>
-            <a:endParaRPr lang="en-US" sz="540" dirty="0"/>
-          </a:p>
-        </p:txBody>
-      </p:sp>
-      <p:sp>
-        <p:nvSpPr>
-          <p:cNvPr id="53" name="Text 51"/>
-          <p:cNvSpPr/>
-          <p:nvPr/>
-        </p:nvSpPr>
-        <p:spPr>
-          <a:xfrm>
-            <a:off x="12260855" y="8843063"/>
-            <a:ext cx="170929" cy="101644"/>
-          </a:xfrm>
-          <a:prstGeom prst="rect">
-            <a:avLst/>
-          </a:prstGeom>
-          <a:noFill/>
-          <a:ln/>
-        </p:spPr>
-        <p:txBody>
-          <a:bodyPr wrap="none" lIns="0" tIns="0" rIns="0" bIns="0" rtlCol="0" anchor="t"/>
-          <a:lstStyle/>
-          <a:p>
-            <a:pPr algn="l" indent="0" marL="0">
-              <a:lnSpc>
-                <a:spcPts val="800"/>
-              </a:lnSpc>
-              <a:buNone/>
-            </a:pPr>
-            <a:r>
-              <a:rPr lang="en-US" sz="640" spc="30" kern="0" dirty="0">
-                <a:solidFill>
-                  <a:srgbClr val="9C7442"/>
-                </a:solidFill>
-                <a:latin typeface="Inter Medium" pitchFamily="34" charset="0"/>
-                <a:ea typeface="Inter Medium" pitchFamily="34" charset="-122"/>
-                <a:cs typeface="Inter Medium" pitchFamily="34" charset="-120"/>
-              </a:rPr>
-              <a:t>05</a:t>
-            </a:r>
-            <a:endParaRPr lang="en-US" sz="640" dirty="0"/>
-          </a:p>
-        </p:txBody>
-      </p:sp>
-      <p:sp>
-        <p:nvSpPr>
-          <p:cNvPr id="54" name="Text 52"/>
-          <p:cNvSpPr/>
-          <p:nvPr/>
-        </p:nvSpPr>
-        <p:spPr>
-          <a:xfrm>
-            <a:off x="12514966" y="8843063"/>
-            <a:ext cx="811646" cy="101644"/>
-          </a:xfrm>
-          <a:prstGeom prst="rect">
-            <a:avLst/>
-          </a:prstGeom>
-          <a:noFill/>
-          <a:ln/>
-        </p:spPr>
-        <p:txBody>
-          <a:bodyPr wrap="none" lIns="0" tIns="0" rIns="0" bIns="0" rtlCol="0" anchor="t"/>
-          <a:lstStyle/>
-          <a:p>
-            <a:pPr algn="l" indent="0" marL="0">
-              <a:lnSpc>
-                <a:spcPts val="800"/>
-              </a:lnSpc>
-              <a:buNone/>
-            </a:pPr>
-            <a:r>
-              <a:rPr lang="en-US" sz="640" spc="30" kern="0" dirty="0">
-                <a:solidFill>
-                  <a:srgbClr val="121519"/>
-                </a:solidFill>
-                <a:latin typeface="Noto Sans JP Medium" pitchFamily="34" charset="0"/>
-                <a:ea typeface="Noto Sans JP Medium" pitchFamily="34" charset="-122"/>
-                <a:cs typeface="Noto Sans JP Medium" pitchFamily="34" charset="-120"/>
-              </a:rPr>
-              <a:t>パートナーシップ</a:t>
-            </a:r>
-            <a:endParaRPr lang="en-US" sz="640" dirty="0"/>
-          </a:p>
-        </p:txBody>
-      </p:sp>
-      <p:sp>
-        <p:nvSpPr>
-          <p:cNvPr id="55" name="Text 53"/>
-          <p:cNvSpPr/>
-          <p:nvPr/>
-        </p:nvSpPr>
-        <p:spPr>
-          <a:xfrm>
-            <a:off x="14357271" y="8843063"/>
-            <a:ext cx="303047" cy="76233"/>
-          </a:xfrm>
-          <a:prstGeom prst="rect">
-            <a:avLst/>
-          </a:prstGeom>
-          <a:noFill/>
-          <a:ln/>
-        </p:spPr>
-        <p:txBody>
-          <a:bodyPr wrap="none" lIns="0" tIns="0" rIns="0" bIns="0" rtlCol="0" anchor="t"/>
-          <a:lstStyle/>
-          <a:p>
-            <a:pPr algn="l" indent="0" marL="0">
-              <a:lnSpc>
-                <a:spcPts val="600"/>
-              </a:lnSpc>
-              <a:buNone/>
-            </a:pPr>
-            <a:r>
-              <a:rPr lang="en-US" sz="540" spc="160" kern="0" dirty="0">
-                <a:solidFill>
-                  <a:srgbClr val="7D838A"/>
-                </a:solidFill>
-                <a:latin typeface="Inter Medium" pitchFamily="34" charset="0"/>
-                <a:ea typeface="Inter Medium" pitchFamily="34" charset="-122"/>
-                <a:cs typeface="Inter Medium" pitchFamily="34" charset="-120"/>
-              </a:rPr>
-              <a:t>P.09</a:t>
-            </a:r>
-            <a:endParaRPr lang="en-US" sz="540" dirty="0"/>
-          </a:p>
-        </p:txBody>
-      </p:sp>
-      <p:sp>
-        <p:nvSpPr>
-          <p:cNvPr id="56" name="Text 54"/>
-          <p:cNvSpPr/>
-          <p:nvPr/>
-        </p:nvSpPr>
-        <p:spPr>
-          <a:xfrm>
-            <a:off x="12260855" y="9109879"/>
-            <a:ext cx="173331" cy="101644"/>
-          </a:xfrm>
-          <a:prstGeom prst="rect">
-            <a:avLst/>
-          </a:prstGeom>
-          <a:noFill/>
-          <a:ln/>
-        </p:spPr>
-        <p:txBody>
-          <a:bodyPr wrap="none" lIns="0" tIns="0" rIns="0" bIns="0" rtlCol="0" anchor="t"/>
-          <a:lstStyle/>
-          <a:p>
-            <a:pPr algn="l" indent="0" marL="0">
-              <a:lnSpc>
-                <a:spcPts val="800"/>
-              </a:lnSpc>
-              <a:buNone/>
-            </a:pPr>
-            <a:r>
-              <a:rPr lang="en-US" sz="640" spc="30" kern="0" dirty="0">
-                <a:solidFill>
-                  <a:srgbClr val="9C7442"/>
-                </a:solidFill>
-                <a:latin typeface="Inter Medium" pitchFamily="34" charset="0"/>
-                <a:ea typeface="Inter Medium" pitchFamily="34" charset="-122"/>
-                <a:cs typeface="Inter Medium" pitchFamily="34" charset="-120"/>
-              </a:rPr>
-              <a:t>06</a:t>
-            </a:r>
-            <a:endParaRPr lang="en-US" sz="640" dirty="0"/>
-          </a:p>
-        </p:txBody>
-      </p:sp>
-      <p:sp>
-        <p:nvSpPr>
-          <p:cNvPr id="57" name="Text 55"/>
-          <p:cNvSpPr/>
-          <p:nvPr/>
-        </p:nvSpPr>
-        <p:spPr>
-          <a:xfrm>
-            <a:off x="12514966" y="9109879"/>
-            <a:ext cx="811646" cy="101644"/>
-          </a:xfrm>
-          <a:prstGeom prst="rect">
-            <a:avLst/>
-          </a:prstGeom>
-          <a:noFill/>
-          <a:ln/>
-        </p:spPr>
-        <p:txBody>
-          <a:bodyPr wrap="none" lIns="0" tIns="0" rIns="0" bIns="0" rtlCol="0" anchor="t"/>
-          <a:lstStyle/>
-          <a:p>
-            <a:pPr algn="l" indent="0" marL="0">
-              <a:lnSpc>
-                <a:spcPts val="800"/>
-              </a:lnSpc>
-              <a:buNone/>
-            </a:pPr>
-            <a:r>
-              <a:rPr lang="en-US" sz="640" spc="30" kern="0" dirty="0">
-                <a:solidFill>
-                  <a:srgbClr val="121519"/>
-                </a:solidFill>
-                <a:latin typeface="Noto Sans JP Medium" pitchFamily="34" charset="0"/>
-                <a:ea typeface="Noto Sans JP Medium" pitchFamily="34" charset="-122"/>
-                <a:cs typeface="Noto Sans JP Medium" pitchFamily="34" charset="-120"/>
-              </a:rPr>
-              <a:t>バリューチェーン</a:t>
-            </a:r>
-            <a:endParaRPr lang="en-US" sz="640" dirty="0"/>
-          </a:p>
-        </p:txBody>
-      </p:sp>
-      <p:sp>
-        <p:nvSpPr>
-          <p:cNvPr id="58" name="Text 56"/>
-          <p:cNvSpPr/>
-          <p:nvPr/>
-        </p:nvSpPr>
-        <p:spPr>
-          <a:xfrm>
-            <a:off x="14357271" y="9109879"/>
-            <a:ext cx="282301" cy="76233"/>
-          </a:xfrm>
-          <a:prstGeom prst="rect">
-            <a:avLst/>
-          </a:prstGeom>
-          <a:noFill/>
-          <a:ln/>
-        </p:spPr>
-        <p:txBody>
-          <a:bodyPr wrap="none" lIns="0" tIns="0" rIns="0" bIns="0" rtlCol="0" anchor="t"/>
-          <a:lstStyle/>
-          <a:p>
-            <a:pPr algn="l" indent="0" marL="0">
-              <a:lnSpc>
-                <a:spcPts val="600"/>
-              </a:lnSpc>
-              <a:buNone/>
-            </a:pPr>
-            <a:r>
-              <a:rPr lang="en-US" sz="540" spc="160" kern="0" dirty="0">
-                <a:solidFill>
-                  <a:srgbClr val="7D838A"/>
-                </a:solidFill>
-                <a:latin typeface="Inter Medium" pitchFamily="34" charset="0"/>
-                <a:ea typeface="Inter Medium" pitchFamily="34" charset="-122"/>
-                <a:cs typeface="Inter Medium" pitchFamily="34" charset="-120"/>
-              </a:rPr>
-              <a:t>P.10</a:t>
-            </a:r>
-            <a:endParaRPr lang="en-US" sz="540" dirty="0"/>
-          </a:p>
-        </p:txBody>
-      </p:sp>
-      <p:sp>
-        <p:nvSpPr>
-          <p:cNvPr id="59" name="Text 57"/>
-          <p:cNvSpPr/>
-          <p:nvPr/>
-        </p:nvSpPr>
-        <p:spPr>
-          <a:xfrm>
-            <a:off x="508222" y="10316906"/>
-            <a:ext cx="201502" cy="88939"/>
-          </a:xfrm>
-          <a:prstGeom prst="rect">
-            <a:avLst/>
-          </a:prstGeom>
-          <a:noFill/>
-          <a:ln/>
-        </p:spPr>
-        <p:txBody>
-          <a:bodyPr wrap="none" lIns="0" tIns="0" rIns="0" bIns="0" rtlCol="0" anchor="t"/>
-          <a:lstStyle/>
-          <a:p>
-            <a:pPr algn="l" indent="0" marL="0">
-              <a:lnSpc>
-                <a:spcPts val="700"/>
-              </a:lnSpc>
-              <a:buNone/>
-            </a:pPr>
-            <a:r>
-              <a:rPr lang="en-US" sz="600" spc="160" kern="0" dirty="0">
-                <a:solidFill>
-                  <a:srgbClr val="7D838A"/>
-                </a:solidFill>
-                <a:latin typeface="Inter Medium" pitchFamily="34" charset="0"/>
-                <a:ea typeface="Inter Medium" pitchFamily="34" charset="-122"/>
-                <a:cs typeface="Inter Medium" pitchFamily="34" charset="-120"/>
-              </a:rPr>
-              <a:t>02</a:t>
-            </a:r>
-            <a:endParaRPr lang="en-US" sz="600" dirty="0"/>
-          </a:p>
-        </p:txBody>
-      </p:sp>
-      <p:sp>
-        <p:nvSpPr>
-          <p:cNvPr id="60" name="Text 58"/>
-          <p:cNvSpPr/>
-          <p:nvPr/>
-        </p:nvSpPr>
-        <p:spPr>
-          <a:xfrm>
-            <a:off x="14458915" y="10316906"/>
-            <a:ext cx="202376" cy="88939"/>
-          </a:xfrm>
-          <a:prstGeom prst="rect">
-            <a:avLst/>
-          </a:prstGeom>
-          <a:noFill/>
-          <a:ln/>
-        </p:spPr>
-        <p:txBody>
-          <a:bodyPr wrap="none" lIns="0" tIns="0" rIns="0" bIns="0" rtlCol="0" anchor="t"/>
-          <a:lstStyle/>
-          <a:p>
-            <a:pPr algn="l" indent="0" marL="0">
-              <a:lnSpc>
-                <a:spcPts val="700"/>
-              </a:lnSpc>
-              <a:buNone/>
-            </a:pPr>
-            <a:r>
-              <a:rPr lang="en-US" sz="600" spc="160" kern="0" dirty="0">
-                <a:solidFill>
-                  <a:srgbClr val="7D838A"/>
-                </a:solidFill>
-                <a:latin typeface="Inter Medium" pitchFamily="34" charset="0"/>
-                <a:ea typeface="Inter Medium" pitchFamily="34" charset="-122"/>
-                <a:cs typeface="Inter Medium" pitchFamily="34" charset="-120"/>
-              </a:rPr>
-              <a:t>03</a:t>
-            </a:r>
-            <a:endParaRPr lang="en-US" sz="600" dirty="0"/>
-          </a:p>
-        </p:txBody>
-      </p:sp>
-      <p:sp>
-        <p:nvSpPr>
           <p:cNvPr id="61" name="Text 59"/>
-          <p:cNvSpPr/>
-          <p:nvPr/>
-        </p:nvSpPr>
-        <p:spPr>
-          <a:xfrm>
-            <a:off x="876683" y="10328977"/>
-            <a:ext cx="6501450" cy="102915"/>
-          </a:xfrm>
-          <a:prstGeom prst="rect">
-            <a:avLst/>
-          </a:prstGeom>
-          <a:noFill/>
-          <a:ln/>
-        </p:spPr>
-        <p:txBody>
-          <a:bodyPr wrap="none" lIns="0" tIns="0" rIns="0" bIns="0" rtlCol="0" anchor="t"/>
-          <a:lstStyle/>
-          <a:p>
-            <a:pPr algn="l" indent="0" marL="0">
-              <a:lnSpc>
-                <a:spcPts val="810"/>
-              </a:lnSpc>
-              <a:buNone/>
-            </a:pPr>
-            <a:r>
-              <a:rPr lang="en-US" sz="540" dirty="0">
-                <a:solidFill>
-                  <a:srgbClr val="A3A8AE"/>
-                </a:solidFill>
-                <a:latin typeface="Noto Sans JP" pitchFamily="34" charset="0"/>
-                <a:ea typeface="Noto Sans JP" pitchFamily="34" charset="-122"/>
-                <a:cs typeface="Noto Sans JP" pitchFamily="34" charset="-120"/>
-              </a:rPr>
-              <a:t>台割メモ｜動画01 OPENING。地球儀は使わず、暮らしと金属の写真を見開きで1枚のモザイクに（左＝暮らし、右＝それを支える金属）。キャッチコピー＋需要と供給のギャップを概念図で。</a:t>
-            </a:r>
-            <a:endParaRPr lang="en-US" sz="540" dirty="0"/>
-          </a:p>
-        </p:txBody>
-      </p:sp>
-      <p:sp>
-        <p:nvSpPr>
-          <p:cNvPr id="62" name="Text 60"/>
           <p:cNvSpPr/>
           <p:nvPr/>
         </p:nvSpPr>
@@ -7102,7 +7060,7 @@
         <p:spPr>
           <a:xfrm>
             <a:off x="9122585" y="9064012"/>
-            <a:ext cx="2915924" cy="285113"/>
+            <a:ext cx="2915924" cy="427669"/>
           </a:xfrm>
           <a:prstGeom prst="rect">
             <a:avLst/>
@@ -7149,7 +7107,27 @@
                 <a:ea typeface="Noto Sans JP" pitchFamily="34" charset="-122"/>
                 <a:cs typeface="Noto Sans JP" pitchFamily="34" charset="-120"/>
               </a:rPr>
-              <a:t>と組みQuellavecoなど大型化。</a:t>
+              <a:t>と組みQuellavecoなど大型化。2012年にRtMを設立し、マーケテ</a:t>
+            </a:r>
+            <a:endParaRPr lang="en-US" sz="660" dirty="0"/>
+          </a:p>
+          <a:p>
+            <a:pPr algn="l" indent="0" marL="0">
+              <a:lnSpc>
+                <a:spcPts val="1122"/>
+              </a:lnSpc>
+              <a:buNone/>
+            </a:pPr>
+            <a:r>
+              <a:rPr lang="en-US" sz="660" spc="20" kern="0" dirty="0">
+                <a:solidFill>
+                  <a:srgbClr val="3D4249"/>
+                </a:solidFill>
+                <a:latin typeface="Noto Sans JP" pitchFamily="34" charset="0"/>
+                <a:ea typeface="Noto Sans JP" pitchFamily="34" charset="-122"/>
+                <a:cs typeface="Noto Sans JP" pitchFamily="34" charset="-120"/>
+              </a:rPr>
+              <a:t>ィングを集約。</a:t>
             </a:r>
             <a:endParaRPr lang="en-US" sz="660" dirty="0"/>
           </a:p>
@@ -7275,7 +7253,7 @@
                 <a:ea typeface="Noto Sans JP" pitchFamily="34" charset="-122"/>
                 <a:cs typeface="Noto Sans JP" pitchFamily="34" charset="-120"/>
               </a:rPr>
-              <a:t>各地のマーケティングをRtMとしてシンガポールに集約。地域特化</a:t>
+              <a:t>地域に特化したトレーディングから、世界の市場を相手にするグロ</a:t>
             </a:r>
             <a:endParaRPr lang="en-US" sz="660" dirty="0"/>
           </a:p>
@@ -7295,7 +7273,7 @@
                 <a:ea typeface="Noto Sans JP" pitchFamily="34" charset="-122"/>
                 <a:cs typeface="Noto Sans JP" pitchFamily="34" charset="-120"/>
               </a:rPr>
-              <a:t>から世界の市場へ。</a:t>
+              <a:t>ーバルなトレーダーへ。</a:t>
             </a:r>
             <a:endParaRPr lang="en-US" sz="660" dirty="0"/>
           </a:p>
@@ -15517,27 +15495,69 @@
         </p:nvSpPr>
         <p:spPr>
           <a:xfrm>
-            <a:off x="12794488" y="7738863"/>
-            <a:ext cx="892009" cy="272407"/>
-          </a:xfrm>
-          <a:prstGeom prst="rect">
-            <a:avLst/>
-          </a:prstGeom>
-          <a:noFill/>
-          <a:ln/>
-        </p:spPr>
-        <p:txBody>
-          <a:bodyPr wrap="none" lIns="0" tIns="0" rIns="0" bIns="0" rtlCol="0" anchor="t"/>
-          <a:lstStyle/>
-          <a:p>
-            <a:pPr algn="l" indent="0" marL="0">
-              <a:lnSpc>
-                <a:spcPts val="1072"/>
-              </a:lnSpc>
-              <a:buNone/>
-            </a:pPr>
-            <a:r>
-              <a:rPr lang="en-US" sz="670" dirty="0">
+            <a:off x="8068024" y="8302481"/>
+            <a:ext cx="1609376" cy="101644"/>
+          </a:xfrm>
+          <a:prstGeom prst="rect">
+            <a:avLst/>
+          </a:prstGeom>
+          <a:noFill/>
+          <a:ln/>
+        </p:spPr>
+        <p:txBody>
+          <a:bodyPr wrap="none" lIns="0" tIns="0" rIns="0" bIns="0" rtlCol="0" anchor="t"/>
+          <a:lstStyle/>
+          <a:p>
+            <a:pPr algn="l" indent="0" marL="0">
+              <a:lnSpc>
+                <a:spcPts val="800"/>
+              </a:lnSpc>
+              <a:buNone/>
+            </a:pPr>
+            <a:r>
+              <a:rPr lang="en-US" sz="660" spc="190" kern="0" dirty="0">
+                <a:solidFill>
+                  <a:srgbClr val="9C7442"/>
+                </a:solidFill>
+                <a:latin typeface="Noto Sans JP Medium" pitchFamily="34" charset="0"/>
+                <a:ea typeface="Noto Sans JP Medium" pitchFamily="34" charset="-122"/>
+                <a:cs typeface="Noto Sans JP Medium" pitchFamily="34" charset="-120"/>
+              </a:rPr>
+              <a:t>パートナーに評価される理由</a:t>
+            </a:r>
+            <a:endParaRPr lang="en-US" sz="660" dirty="0"/>
+          </a:p>
+        </p:txBody>
+      </p:sp>
+      <p:sp>
+        <p:nvSpPr>
+          <p:cNvPr id="85" name="Text 83"/>
+          <p:cNvSpPr/>
+          <p:nvPr/>
+        </p:nvSpPr>
+        <p:spPr>
+          <a:xfrm>
+            <a:off x="9846801" y="8302481"/>
+            <a:ext cx="1358025" cy="127055"/>
+          </a:xfrm>
+          <a:prstGeom prst="rect">
+            <a:avLst/>
+          </a:prstGeom>
+          <a:noFill/>
+          <a:ln/>
+        </p:spPr>
+        <p:txBody>
+          <a:bodyPr wrap="none" lIns="0" tIns="0" rIns="0" bIns="0" rtlCol="0" anchor="t"/>
+          <a:lstStyle/>
+          <a:p>
+            <a:pPr algn="l" indent="0" marL="0">
+              <a:lnSpc>
+                <a:spcPts val="1000"/>
+              </a:lnSpc>
+              <a:buNone/>
+            </a:pPr>
+            <a:r>
+              <a:rPr lang="en-US" sz="660" spc="60" kern="0" dirty="0">
                 <a:solidFill>
                   <a:srgbClr val="7D838A"/>
                 </a:solidFill>
@@ -15545,10 +15565,74 @@
                 <a:ea typeface="Noto Sans JP" pitchFamily="34" charset="-122"/>
                 <a:cs typeface="Noto Sans JP" pitchFamily="34" charset="-120"/>
               </a:rPr>
-              <a:t>他社ロゴは使用せず</a:t>
-            </a:r>
-            <a:endParaRPr lang="en-US" sz="670" dirty="0"/>
-          </a:p>
+              <a:t>パートナーに評価される理由</a:t>
+            </a:r>
+            <a:endParaRPr lang="en-US" sz="660" dirty="0"/>
+          </a:p>
+        </p:txBody>
+      </p:sp>
+      <p:sp>
+        <p:nvSpPr>
+          <p:cNvPr id="86" name="Text 84"/>
+          <p:cNvSpPr/>
+          <p:nvPr/>
+        </p:nvSpPr>
+        <p:spPr>
+          <a:xfrm>
+            <a:off x="8220491" y="8649787"/>
+            <a:ext cx="921053" cy="169365"/>
+          </a:xfrm>
+          <a:prstGeom prst="rect">
+            <a:avLst/>
+          </a:prstGeom>
+          <a:noFill/>
+          <a:ln/>
+        </p:spPr>
+        <p:txBody>
+          <a:bodyPr wrap="none" lIns="0" tIns="0" rIns="0" bIns="0" rtlCol="0" anchor="t"/>
+          <a:lstStyle/>
+          <a:p>
+            <a:pPr algn="l" indent="0" marL="0">
+              <a:lnSpc>
+                <a:spcPts val="1333"/>
+              </a:lnSpc>
+              <a:buNone/>
+            </a:pPr>
+            <a:r>
+              <a:rPr lang="en-US" sz="860" spc="30" kern="0" dirty="0">
+                <a:solidFill>
+                  <a:srgbClr val="121519"/>
+                </a:solidFill>
+                <a:latin typeface="Noto Sans JP Medium" pitchFamily="34" charset="0"/>
+                <a:ea typeface="Noto Sans JP Medium" pitchFamily="34" charset="-122"/>
+                <a:cs typeface="Noto Sans JP Medium" pitchFamily="34" charset="-120"/>
+              </a:rPr>
+              <a:t>中長期的な視座</a:t>
+            </a:r>
+            <a:endParaRPr lang="en-US" sz="860" dirty="0"/>
+          </a:p>
+        </p:txBody>
+      </p:sp>
+      <p:sp>
+        <p:nvSpPr>
+          <p:cNvPr id="87" name="Text 85"/>
+          <p:cNvSpPr/>
+          <p:nvPr/>
+        </p:nvSpPr>
+        <p:spPr>
+          <a:xfrm>
+            <a:off x="8220491" y="8860922"/>
+            <a:ext cx="1915540" cy="272407"/>
+          </a:xfrm>
+          <a:prstGeom prst="rect">
+            <a:avLst/>
+          </a:prstGeom>
+          <a:noFill/>
+          <a:ln/>
+        </p:spPr>
+        <p:txBody>
+          <a:bodyPr wrap="none" lIns="0" tIns="0" rIns="0" bIns="0" rtlCol="0" anchor="t"/>
+          <a:lstStyle/>
           <a:p>
             <a:pPr algn="l" indent="0" marL="0">
               <a:lnSpc>
@@ -15565,83 +15649,103 @@
                 <a:ea typeface="Noto Sans JP" pitchFamily="34" charset="-122"/>
                 <a:cs typeface="Noto Sans JP" pitchFamily="34" charset="-120"/>
               </a:rPr>
-              <a:t>社名テキストで表記</a:t>
+              <a:t>資源事業は長期にわたる。短期的リターンを</a:t>
             </a:r>
             <a:endParaRPr lang="en-US" sz="670" dirty="0"/>
           </a:p>
-        </p:txBody>
-      </p:sp>
-      <p:sp>
-        <p:nvSpPr>
-          <p:cNvPr id="85" name="Text 83"/>
-          <p:cNvSpPr/>
-          <p:nvPr/>
-        </p:nvSpPr>
-        <p:spPr>
-          <a:xfrm>
-            <a:off x="8068024" y="8302481"/>
-            <a:ext cx="1609376" cy="101644"/>
-          </a:xfrm>
-          <a:prstGeom prst="rect">
-            <a:avLst/>
-          </a:prstGeom>
-          <a:noFill/>
-          <a:ln/>
-        </p:spPr>
-        <p:txBody>
-          <a:bodyPr wrap="none" lIns="0" tIns="0" rIns="0" bIns="0" rtlCol="0" anchor="t"/>
-          <a:lstStyle/>
-          <a:p>
-            <a:pPr algn="l" indent="0" marL="0">
-              <a:lnSpc>
-                <a:spcPts val="800"/>
-              </a:lnSpc>
-              <a:buNone/>
-            </a:pPr>
-            <a:r>
-              <a:rPr lang="en-US" sz="660" spc="190" kern="0" dirty="0">
-                <a:solidFill>
-                  <a:srgbClr val="9C7442"/>
+          <a:p>
+            <a:pPr algn="l" indent="0" marL="0">
+              <a:lnSpc>
+                <a:spcPts val="1072"/>
+              </a:lnSpc>
+              <a:buNone/>
+            </a:pPr>
+            <a:r>
+              <a:rPr lang="en-US" sz="670" dirty="0">
+                <a:solidFill>
+                  <a:srgbClr val="7D838A"/>
+                </a:solidFill>
+                <a:latin typeface="Noto Sans JP" pitchFamily="34" charset="0"/>
+                <a:ea typeface="Noto Sans JP" pitchFamily="34" charset="-122"/>
+                <a:cs typeface="Noto Sans JP" pitchFamily="34" charset="-120"/>
+              </a:rPr>
+              <a:t>求める投資家とは一線を画す。</a:t>
+            </a:r>
+            <a:endParaRPr lang="en-US" sz="670" dirty="0"/>
+          </a:p>
+        </p:txBody>
+      </p:sp>
+      <p:sp>
+        <p:nvSpPr>
+          <p:cNvPr id="88" name="Text 86"/>
+          <p:cNvSpPr/>
+          <p:nvPr/>
+        </p:nvSpPr>
+        <p:spPr>
+          <a:xfrm>
+            <a:off x="10456667" y="8649787"/>
+            <a:ext cx="1169566" cy="169365"/>
+          </a:xfrm>
+          <a:prstGeom prst="rect">
+            <a:avLst/>
+          </a:prstGeom>
+          <a:noFill/>
+          <a:ln/>
+        </p:spPr>
+        <p:txBody>
+          <a:bodyPr wrap="none" lIns="0" tIns="0" rIns="0" bIns="0" rtlCol="0" anchor="t"/>
+          <a:lstStyle/>
+          <a:p>
+            <a:pPr algn="l" indent="0" marL="0">
+              <a:lnSpc>
+                <a:spcPts val="1333"/>
+              </a:lnSpc>
+              <a:buNone/>
+            </a:pPr>
+            <a:r>
+              <a:rPr lang="en-US" sz="860" spc="30" kern="0" dirty="0">
+                <a:solidFill>
+                  <a:srgbClr val="121519"/>
                 </a:solidFill>
                 <a:latin typeface="Noto Sans JP Medium" pitchFamily="34" charset="0"/>
                 <a:ea typeface="Noto Sans JP Medium" pitchFamily="34" charset="-122"/>
                 <a:cs typeface="Noto Sans JP Medium" pitchFamily="34" charset="-120"/>
               </a:rPr>
-              <a:t>パートナーに評価される理由</a:t>
-            </a:r>
-            <a:endParaRPr lang="en-US" sz="660" dirty="0"/>
-          </a:p>
-        </p:txBody>
-      </p:sp>
-      <p:sp>
-        <p:nvSpPr>
-          <p:cNvPr id="86" name="Text 84"/>
-          <p:cNvSpPr/>
-          <p:nvPr/>
-        </p:nvSpPr>
-        <p:spPr>
-          <a:xfrm>
-            <a:off x="9846801" y="8302481"/>
-            <a:ext cx="1358025" cy="127055"/>
-          </a:xfrm>
-          <a:prstGeom prst="rect">
-            <a:avLst/>
-          </a:prstGeom>
-          <a:noFill/>
-          <a:ln/>
-        </p:spPr>
-        <p:txBody>
-          <a:bodyPr wrap="none" lIns="0" tIns="0" rIns="0" bIns="0" rtlCol="0" anchor="t"/>
-          <a:lstStyle/>
-          <a:p>
-            <a:pPr algn="l" indent="0" marL="0">
-              <a:lnSpc>
-                <a:spcPts val="1000"/>
-              </a:lnSpc>
-              <a:buNone/>
-            </a:pPr>
-            <a:r>
-              <a:rPr lang="en-US" sz="660" spc="60" kern="0" dirty="0">
+              <a:t>リスクシェアリング</a:t>
+            </a:r>
+            <a:endParaRPr lang="en-US" sz="860" dirty="0"/>
+          </a:p>
+        </p:txBody>
+      </p:sp>
+      <p:sp>
+        <p:nvSpPr>
+          <p:cNvPr id="89" name="Text 87"/>
+          <p:cNvSpPr/>
+          <p:nvPr/>
+        </p:nvSpPr>
+        <p:spPr>
+          <a:xfrm>
+            <a:off x="10456667" y="8860922"/>
+            <a:ext cx="1915540" cy="272407"/>
+          </a:xfrm>
+          <a:prstGeom prst="rect">
+            <a:avLst/>
+          </a:prstGeom>
+          <a:noFill/>
+          <a:ln/>
+        </p:spPr>
+        <p:txBody>
+          <a:bodyPr wrap="none" lIns="0" tIns="0" rIns="0" bIns="0" rtlCol="0" anchor="t"/>
+          <a:lstStyle/>
+          <a:p>
+            <a:pPr algn="l" indent="0" marL="0">
+              <a:lnSpc>
+                <a:spcPts val="1072"/>
+              </a:lnSpc>
+              <a:buNone/>
+            </a:pPr>
+            <a:r>
+              <a:rPr lang="en-US" sz="670" dirty="0">
                 <a:solidFill>
                   <a:srgbClr val="7D838A"/>
                 </a:solidFill>
@@ -15649,22 +15753,42 @@
                 <a:ea typeface="Noto Sans JP" pitchFamily="34" charset="-122"/>
                 <a:cs typeface="Noto Sans JP" pitchFamily="34" charset="-120"/>
               </a:rPr>
-              <a:t>パートナーに評価される理由</a:t>
-            </a:r>
-            <a:endParaRPr lang="en-US" sz="660" dirty="0"/>
-          </a:p>
-        </p:txBody>
-      </p:sp>
-      <p:sp>
-        <p:nvSpPr>
-          <p:cNvPr id="87" name="Text 85"/>
-          <p:cNvSpPr/>
-          <p:nvPr/>
-        </p:nvSpPr>
-        <p:spPr>
-          <a:xfrm>
-            <a:off x="8220491" y="8649787"/>
-            <a:ext cx="921053" cy="169365"/>
+              <a:t>リスクの高い案件ほど、資金面の分担を担保</a:t>
+            </a:r>
+            <a:endParaRPr lang="en-US" sz="670" dirty="0"/>
+          </a:p>
+          <a:p>
+            <a:pPr algn="l" indent="0" marL="0">
+              <a:lnSpc>
+                <a:spcPts val="1072"/>
+              </a:lnSpc>
+              <a:buNone/>
+            </a:pPr>
+            <a:r>
+              <a:rPr lang="en-US" sz="670" dirty="0">
+                <a:solidFill>
+                  <a:srgbClr val="7D838A"/>
+                </a:solidFill>
+                <a:latin typeface="Noto Sans JP" pitchFamily="34" charset="0"/>
+                <a:ea typeface="Noto Sans JP" pitchFamily="34" charset="-122"/>
+                <a:cs typeface="Noto Sans JP" pitchFamily="34" charset="-120"/>
+              </a:rPr>
+              <a:t>する。</a:t>
+            </a:r>
+            <a:endParaRPr lang="en-US" sz="670" dirty="0"/>
+          </a:p>
+        </p:txBody>
+      </p:sp>
+      <p:sp>
+        <p:nvSpPr>
+          <p:cNvPr id="90" name="Text 88"/>
+          <p:cNvSpPr/>
+          <p:nvPr/>
+        </p:nvSpPr>
+        <p:spPr>
+          <a:xfrm>
+            <a:off x="12692844" y="8649787"/>
+            <a:ext cx="423809" cy="169365"/>
           </a:xfrm>
           <a:prstGeom prst="rect">
             <a:avLst/>
@@ -15691,7 +15815,7 @@
                 <a:ea typeface="Noto Sans JP Medium" pitchFamily="34" charset="-122"/>
                 <a:cs typeface="Noto Sans JP Medium" pitchFamily="34" charset="-120"/>
               </a:rPr>
-              <a:t>中長期的な視座</a:t>
+              <a:t>総合力</a:t>
             </a:r>
             <a:endParaRPr lang="en-US" sz="860" dirty="0"/>
           </a:p>
@@ -15699,14 +15823,14 @@
       </p:sp>
       <p:sp>
         <p:nvSpPr>
-          <p:cNvPr id="88" name="Text 86"/>
-          <p:cNvSpPr/>
-          <p:nvPr/>
-        </p:nvSpPr>
-        <p:spPr>
-          <a:xfrm>
-            <a:off x="8220491" y="8860922"/>
-            <a:ext cx="1915540" cy="272407"/>
+          <p:cNvPr id="91" name="Text 89"/>
+          <p:cNvSpPr/>
+          <p:nvPr/>
+        </p:nvSpPr>
+        <p:spPr>
+          <a:xfrm>
+            <a:off x="12692844" y="8860922"/>
+            <a:ext cx="1920126" cy="272407"/>
           </a:xfrm>
           <a:prstGeom prst="rect">
             <a:avLst/>
@@ -15733,7 +15857,7 @@
                 <a:ea typeface="Noto Sans JP" pitchFamily="34" charset="-122"/>
                 <a:cs typeface="Noto Sans JP" pitchFamily="34" charset="-120"/>
               </a:rPr>
-              <a:t>資源事業は長期にわたる。短期的リターンを</a:t>
+              <a:t>幅広い産業接点を通じ、多様なバリューチェ</a:t>
             </a:r>
             <a:endParaRPr lang="en-US" sz="670" dirty="0"/>
           </a:p>
@@ -15753,7 +15877,7 @@
                 <a:ea typeface="Noto Sans JP" pitchFamily="34" charset="-122"/>
                 <a:cs typeface="Noto Sans JP" pitchFamily="34" charset="-120"/>
               </a:rPr>
-              <a:t>求める投資家とは一線を画す。</a:t>
+              <a:t>ーンに知見を提供する。</a:t>
             </a:r>
             <a:endParaRPr lang="en-US" sz="670" dirty="0"/>
           </a:p>
@@ -15761,361 +15885,153 @@
       </p:sp>
       <p:sp>
         <p:nvSpPr>
-          <p:cNvPr id="89" name="Text 87"/>
-          <p:cNvSpPr/>
-          <p:nvPr/>
-        </p:nvSpPr>
-        <p:spPr>
-          <a:xfrm>
-            <a:off x="10456667" y="8649787"/>
-            <a:ext cx="1169566" cy="169365"/>
-          </a:xfrm>
-          <a:prstGeom prst="rect">
-            <a:avLst/>
-          </a:prstGeom>
-          <a:noFill/>
-          <a:ln/>
-        </p:spPr>
-        <p:txBody>
-          <a:bodyPr wrap="none" lIns="0" tIns="0" rIns="0" bIns="0" rtlCol="0" anchor="t"/>
-          <a:lstStyle/>
-          <a:p>
-            <a:pPr algn="l" indent="0" marL="0">
-              <a:lnSpc>
-                <a:spcPts val="1333"/>
-              </a:lnSpc>
-              <a:buNone/>
-            </a:pPr>
-            <a:r>
-              <a:rPr lang="en-US" sz="860" spc="30" kern="0" dirty="0">
-                <a:solidFill>
-                  <a:srgbClr val="121519"/>
-                </a:solidFill>
-                <a:latin typeface="Noto Sans JP Medium" pitchFamily="34" charset="0"/>
-                <a:ea typeface="Noto Sans JP Medium" pitchFamily="34" charset="-122"/>
-                <a:cs typeface="Noto Sans JP Medium" pitchFamily="34" charset="-120"/>
-              </a:rPr>
-              <a:t>リスクシェアリング</a:t>
-            </a:r>
-            <a:endParaRPr lang="en-US" sz="860" dirty="0"/>
-          </a:p>
-        </p:txBody>
-      </p:sp>
-      <p:sp>
-        <p:nvSpPr>
-          <p:cNvPr id="90" name="Text 88"/>
-          <p:cNvSpPr/>
-          <p:nvPr/>
-        </p:nvSpPr>
-        <p:spPr>
-          <a:xfrm>
-            <a:off x="10456667" y="8860922"/>
-            <a:ext cx="1915540" cy="272407"/>
-          </a:xfrm>
-          <a:prstGeom prst="rect">
-            <a:avLst/>
-          </a:prstGeom>
-          <a:noFill/>
-          <a:ln/>
-        </p:spPr>
-        <p:txBody>
-          <a:bodyPr wrap="none" lIns="0" tIns="0" rIns="0" bIns="0" rtlCol="0" anchor="t"/>
-          <a:lstStyle/>
-          <a:p>
-            <a:pPr algn="l" indent="0" marL="0">
-              <a:lnSpc>
-                <a:spcPts val="1072"/>
-              </a:lnSpc>
-              <a:buNone/>
-            </a:pPr>
-            <a:r>
-              <a:rPr lang="en-US" sz="670" dirty="0">
+          <p:cNvPr id="92" name="Text 90"/>
+          <p:cNvSpPr/>
+          <p:nvPr/>
+        </p:nvSpPr>
+        <p:spPr>
+          <a:xfrm>
+            <a:off x="508222" y="10316906"/>
+            <a:ext cx="202594" cy="88939"/>
+          </a:xfrm>
+          <a:prstGeom prst="rect">
+            <a:avLst/>
+          </a:prstGeom>
+          <a:noFill/>
+          <a:ln/>
+        </p:spPr>
+        <p:txBody>
+          <a:bodyPr wrap="none" lIns="0" tIns="0" rIns="0" bIns="0" rtlCol="0" anchor="t"/>
+          <a:lstStyle/>
+          <a:p>
+            <a:pPr algn="l" indent="0" marL="0">
+              <a:lnSpc>
+                <a:spcPts val="700"/>
+              </a:lnSpc>
+              <a:buNone/>
+            </a:pPr>
+            <a:r>
+              <a:rPr lang="en-US" sz="600" spc="160" kern="0" dirty="0">
                 <a:solidFill>
                   <a:srgbClr val="7D838A"/>
+                </a:solidFill>
+                <a:latin typeface="Inter Medium" pitchFamily="34" charset="0"/>
+                <a:ea typeface="Inter Medium" pitchFamily="34" charset="-122"/>
+                <a:cs typeface="Inter Medium" pitchFamily="34" charset="-120"/>
+              </a:rPr>
+              <a:t>08</a:t>
+            </a:r>
+            <a:endParaRPr lang="en-US" sz="600" dirty="0"/>
+          </a:p>
+        </p:txBody>
+      </p:sp>
+      <p:sp>
+        <p:nvSpPr>
+          <p:cNvPr id="93" name="Text 91"/>
+          <p:cNvSpPr/>
+          <p:nvPr/>
+        </p:nvSpPr>
+        <p:spPr>
+          <a:xfrm>
+            <a:off x="14458915" y="10316906"/>
+            <a:ext cx="202594" cy="88939"/>
+          </a:xfrm>
+          <a:prstGeom prst="rect">
+            <a:avLst/>
+          </a:prstGeom>
+          <a:noFill/>
+          <a:ln/>
+        </p:spPr>
+        <p:txBody>
+          <a:bodyPr wrap="none" lIns="0" tIns="0" rIns="0" bIns="0" rtlCol="0" anchor="t"/>
+          <a:lstStyle/>
+          <a:p>
+            <a:pPr algn="l" indent="0" marL="0">
+              <a:lnSpc>
+                <a:spcPts val="700"/>
+              </a:lnSpc>
+              <a:buNone/>
+            </a:pPr>
+            <a:r>
+              <a:rPr lang="en-US" sz="600" spc="160" kern="0" dirty="0">
+                <a:solidFill>
+                  <a:srgbClr val="7D838A"/>
+                </a:solidFill>
+                <a:latin typeface="Inter Medium" pitchFamily="34" charset="0"/>
+                <a:ea typeface="Inter Medium" pitchFamily="34" charset="-122"/>
+                <a:cs typeface="Inter Medium" pitchFamily="34" charset="-120"/>
+              </a:rPr>
+              <a:t>09</a:t>
+            </a:r>
+            <a:endParaRPr lang="en-US" sz="600" dirty="0"/>
+          </a:p>
+        </p:txBody>
+      </p:sp>
+      <p:sp>
+        <p:nvSpPr>
+          <p:cNvPr id="94" name="Text 92"/>
+          <p:cNvSpPr/>
+          <p:nvPr/>
+        </p:nvSpPr>
+        <p:spPr>
+          <a:xfrm>
+            <a:off x="876683" y="10328977"/>
+            <a:ext cx="6271062" cy="205830"/>
+          </a:xfrm>
+          <a:prstGeom prst="rect">
+            <a:avLst/>
+          </a:prstGeom>
+          <a:noFill/>
+          <a:ln/>
+        </p:spPr>
+        <p:txBody>
+          <a:bodyPr wrap="none" lIns="0" tIns="0" rIns="0" bIns="0" rtlCol="0" anchor="t"/>
+          <a:lstStyle/>
+          <a:p>
+            <a:pPr algn="l" indent="0" marL="0">
+              <a:lnSpc>
+                <a:spcPts val="810"/>
+              </a:lnSpc>
+              <a:buNone/>
+            </a:pPr>
+            <a:r>
+              <a:rPr lang="en-US" sz="540" dirty="0">
+                <a:solidFill>
+                  <a:srgbClr val="A3A8AE"/>
                 </a:solidFill>
                 <a:latin typeface="Noto Sans JP" pitchFamily="34" charset="0"/>
                 <a:ea typeface="Noto Sans JP" pitchFamily="34" charset="-122"/>
                 <a:cs typeface="Noto Sans JP" pitchFamily="34" charset="-120"/>
               </a:rPr>
-              <a:t>リスクの高い案件ほど、資金面の分担を担保</a:t>
-            </a:r>
-            <a:endParaRPr lang="en-US" sz="670" dirty="0"/>
-          </a:p>
-          <a:p>
-            <a:pPr algn="l" indent="0" marL="0">
-              <a:lnSpc>
-                <a:spcPts val="1072"/>
-              </a:lnSpc>
-              <a:buNone/>
-            </a:pPr>
-            <a:r>
-              <a:rPr lang="en-US" sz="670" dirty="0">
-                <a:solidFill>
-                  <a:srgbClr val="7D838A"/>
+              <a:t>台割メモ｜動画06 From Resources to Value。その他資源を6つのカードで（案件名と地域）。銅の品位の変化（1%→20–30%→99.99%）の上に、技術投資（CiDRA・Jetti・DESCycle・</a:t>
+            </a:r>
+            <a:endParaRPr lang="en-US" sz="540" dirty="0"/>
+          </a:p>
+          <a:p>
+            <a:pPr algn="l" indent="0" marL="0">
+              <a:lnSpc>
+                <a:spcPts val="810"/>
+              </a:lnSpc>
+              <a:buNone/>
+            </a:pPr>
+            <a:r>
+              <a:rPr lang="en-US" sz="540" dirty="0">
+                <a:solidFill>
+                  <a:srgbClr val="A3A8AE"/>
                 </a:solidFill>
                 <a:latin typeface="Noto Sans JP" pitchFamily="34" charset="0"/>
                 <a:ea typeface="Noto Sans JP" pitchFamily="34" charset="-122"/>
                 <a:cs typeface="Noto Sans JP" pitchFamily="34" charset="-120"/>
               </a:rPr>
-              <a:t>する。</a:t>
-            </a:r>
-            <a:endParaRPr lang="en-US" sz="670" dirty="0"/>
-          </a:p>
-        </p:txBody>
-      </p:sp>
-      <p:sp>
-        <p:nvSpPr>
-          <p:cNvPr id="91" name="Text 89"/>
-          <p:cNvSpPr/>
-          <p:nvPr/>
-        </p:nvSpPr>
-        <p:spPr>
-          <a:xfrm>
-            <a:off x="12692844" y="8649787"/>
-            <a:ext cx="423809" cy="169365"/>
-          </a:xfrm>
-          <a:prstGeom prst="rect">
-            <a:avLst/>
-          </a:prstGeom>
-          <a:noFill/>
-          <a:ln/>
-        </p:spPr>
-        <p:txBody>
-          <a:bodyPr wrap="none" lIns="0" tIns="0" rIns="0" bIns="0" rtlCol="0" anchor="t"/>
-          <a:lstStyle/>
-          <a:p>
-            <a:pPr algn="l" indent="0" marL="0">
-              <a:lnSpc>
-                <a:spcPts val="1333"/>
-              </a:lnSpc>
-              <a:buNone/>
-            </a:pPr>
-            <a:r>
-              <a:rPr lang="en-US" sz="860" spc="30" kern="0" dirty="0">
-                <a:solidFill>
-                  <a:srgbClr val="121519"/>
-                </a:solidFill>
-                <a:latin typeface="Noto Sans JP Medium" pitchFamily="34" charset="0"/>
-                <a:ea typeface="Noto Sans JP Medium" pitchFamily="34" charset="-122"/>
-                <a:cs typeface="Noto Sans JP Medium" pitchFamily="34" charset="-120"/>
-              </a:rPr>
-              <a:t>総合力</a:t>
-            </a:r>
-            <a:endParaRPr lang="en-US" sz="860" dirty="0"/>
-          </a:p>
-        </p:txBody>
-      </p:sp>
-      <p:sp>
-        <p:nvSpPr>
-          <p:cNvPr id="92" name="Text 90"/>
-          <p:cNvSpPr/>
-          <p:nvPr/>
-        </p:nvSpPr>
-        <p:spPr>
-          <a:xfrm>
-            <a:off x="12692844" y="8860922"/>
-            <a:ext cx="1920126" cy="272407"/>
-          </a:xfrm>
-          <a:prstGeom prst="rect">
-            <a:avLst/>
-          </a:prstGeom>
-          <a:noFill/>
-          <a:ln/>
-        </p:spPr>
-        <p:txBody>
-          <a:bodyPr wrap="none" lIns="0" tIns="0" rIns="0" bIns="0" rtlCol="0" anchor="t"/>
-          <a:lstStyle/>
-          <a:p>
-            <a:pPr algn="l" indent="0" marL="0">
-              <a:lnSpc>
-                <a:spcPts val="1072"/>
-              </a:lnSpc>
-              <a:buNone/>
-            </a:pPr>
-            <a:r>
-              <a:rPr lang="en-US" sz="670" dirty="0">
-                <a:solidFill>
-                  <a:srgbClr val="7D838A"/>
-                </a:solidFill>
-                <a:latin typeface="Noto Sans JP" pitchFamily="34" charset="0"/>
-                <a:ea typeface="Noto Sans JP" pitchFamily="34" charset="-122"/>
-                <a:cs typeface="Noto Sans JP" pitchFamily="34" charset="-120"/>
-              </a:rPr>
-              <a:t>幅広い産業接点を通じ、多様なバリューチェ</a:t>
-            </a:r>
-            <a:endParaRPr lang="en-US" sz="670" dirty="0"/>
-          </a:p>
-          <a:p>
-            <a:pPr algn="l" indent="0" marL="0">
-              <a:lnSpc>
-                <a:spcPts val="1072"/>
-              </a:lnSpc>
-              <a:buNone/>
-            </a:pPr>
-            <a:r>
-              <a:rPr lang="en-US" sz="670" dirty="0">
-                <a:solidFill>
-                  <a:srgbClr val="7D838A"/>
-                </a:solidFill>
-                <a:latin typeface="Noto Sans JP" pitchFamily="34" charset="0"/>
-                <a:ea typeface="Noto Sans JP" pitchFamily="34" charset="-122"/>
-                <a:cs typeface="Noto Sans JP" pitchFamily="34" charset="-120"/>
-              </a:rPr>
-              <a:t>ーンに知見を提供する。</a:t>
-            </a:r>
-            <a:endParaRPr lang="en-US" sz="670" dirty="0"/>
-          </a:p>
-        </p:txBody>
-      </p:sp>
-      <p:sp>
-        <p:nvSpPr>
-          <p:cNvPr id="93" name="Text 91"/>
-          <p:cNvSpPr/>
-          <p:nvPr/>
-        </p:nvSpPr>
-        <p:spPr>
-          <a:xfrm>
-            <a:off x="508222" y="10316906"/>
-            <a:ext cx="202594" cy="88939"/>
-          </a:xfrm>
-          <a:prstGeom prst="rect">
-            <a:avLst/>
-          </a:prstGeom>
-          <a:noFill/>
-          <a:ln/>
-        </p:spPr>
-        <p:txBody>
-          <a:bodyPr wrap="none" lIns="0" tIns="0" rIns="0" bIns="0" rtlCol="0" anchor="t"/>
-          <a:lstStyle/>
-          <a:p>
-            <a:pPr algn="l" indent="0" marL="0">
-              <a:lnSpc>
-                <a:spcPts val="700"/>
-              </a:lnSpc>
-              <a:buNone/>
-            </a:pPr>
-            <a:r>
-              <a:rPr lang="en-US" sz="600" spc="160" kern="0" dirty="0">
-                <a:solidFill>
-                  <a:srgbClr val="7D838A"/>
-                </a:solidFill>
-                <a:latin typeface="Inter Medium" pitchFamily="34" charset="0"/>
-                <a:ea typeface="Inter Medium" pitchFamily="34" charset="-122"/>
-                <a:cs typeface="Inter Medium" pitchFamily="34" charset="-120"/>
-              </a:rPr>
-              <a:t>08</a:t>
-            </a:r>
-            <a:endParaRPr lang="en-US" sz="600" dirty="0"/>
-          </a:p>
-        </p:txBody>
-      </p:sp>
-      <p:sp>
-        <p:nvSpPr>
-          <p:cNvPr id="94" name="Text 92"/>
-          <p:cNvSpPr/>
-          <p:nvPr/>
-        </p:nvSpPr>
-        <p:spPr>
-          <a:xfrm>
-            <a:off x="14458915" y="10316906"/>
-            <a:ext cx="202594" cy="88939"/>
-          </a:xfrm>
-          <a:prstGeom prst="rect">
-            <a:avLst/>
-          </a:prstGeom>
-          <a:noFill/>
-          <a:ln/>
-        </p:spPr>
-        <p:txBody>
-          <a:bodyPr wrap="none" lIns="0" tIns="0" rIns="0" bIns="0" rtlCol="0" anchor="t"/>
-          <a:lstStyle/>
-          <a:p>
-            <a:pPr algn="l" indent="0" marL="0">
-              <a:lnSpc>
-                <a:spcPts val="700"/>
-              </a:lnSpc>
-              <a:buNone/>
-            </a:pPr>
-            <a:r>
-              <a:rPr lang="en-US" sz="600" spc="160" kern="0" dirty="0">
-                <a:solidFill>
-                  <a:srgbClr val="7D838A"/>
-                </a:solidFill>
-                <a:latin typeface="Inter Medium" pitchFamily="34" charset="0"/>
-                <a:ea typeface="Inter Medium" pitchFamily="34" charset="-122"/>
-                <a:cs typeface="Inter Medium" pitchFamily="34" charset="-120"/>
-              </a:rPr>
-              <a:t>09</a:t>
-            </a:r>
-            <a:endParaRPr lang="en-US" sz="600" dirty="0"/>
+              <a:t>Triland）を配置。</a:t>
+            </a:r>
+            <a:endParaRPr lang="en-US" sz="540" dirty="0"/>
           </a:p>
         </p:txBody>
       </p:sp>
       <p:sp>
         <p:nvSpPr>
           <p:cNvPr id="95" name="Text 93"/>
-          <p:cNvSpPr/>
-          <p:nvPr/>
-        </p:nvSpPr>
-        <p:spPr>
-          <a:xfrm>
-            <a:off x="876683" y="10328977"/>
-            <a:ext cx="6271062" cy="205830"/>
-          </a:xfrm>
-          <a:prstGeom prst="rect">
-            <a:avLst/>
-          </a:prstGeom>
-          <a:noFill/>
-          <a:ln/>
-        </p:spPr>
-        <p:txBody>
-          <a:bodyPr wrap="none" lIns="0" tIns="0" rIns="0" bIns="0" rtlCol="0" anchor="t"/>
-          <a:lstStyle/>
-          <a:p>
-            <a:pPr algn="l" indent="0" marL="0">
-              <a:lnSpc>
-                <a:spcPts val="810"/>
-              </a:lnSpc>
-              <a:buNone/>
-            </a:pPr>
-            <a:r>
-              <a:rPr lang="en-US" sz="540" dirty="0">
-                <a:solidFill>
-                  <a:srgbClr val="A3A8AE"/>
-                </a:solidFill>
-                <a:latin typeface="Noto Sans JP" pitchFamily="34" charset="0"/>
-                <a:ea typeface="Noto Sans JP" pitchFamily="34" charset="-122"/>
-                <a:cs typeface="Noto Sans JP" pitchFamily="34" charset="-120"/>
-              </a:rPr>
-              <a:t>台割メモ｜動画06 From Resources to Value。その他資源を6つのカードで（案件名と地域）。銅の品位の変化（1%→20–30%→99.99%）の上に、技術投資（CiDRA・Jetti・DESCycle・</a:t>
-            </a:r>
-            <a:endParaRPr lang="en-US" sz="540" dirty="0"/>
-          </a:p>
-          <a:p>
-            <a:pPr algn="l" indent="0" marL="0">
-              <a:lnSpc>
-                <a:spcPts val="810"/>
-              </a:lnSpc>
-              <a:buNone/>
-            </a:pPr>
-            <a:r>
-              <a:rPr lang="en-US" sz="540" dirty="0">
-                <a:solidFill>
-                  <a:srgbClr val="A3A8AE"/>
-                </a:solidFill>
-                <a:latin typeface="Noto Sans JP" pitchFamily="34" charset="0"/>
-                <a:ea typeface="Noto Sans JP" pitchFamily="34" charset="-122"/>
-                <a:cs typeface="Noto Sans JP" pitchFamily="34" charset="-120"/>
-              </a:rPr>
-              <a:t>Triland）を配置。</a:t>
-            </a:r>
-            <a:endParaRPr lang="en-US" sz="540" dirty="0"/>
-          </a:p>
-        </p:txBody>
-      </p:sp>
-      <p:sp>
-        <p:nvSpPr>
-          <p:cNvPr id="96" name="Text 94"/>
           <p:cNvSpPr/>
           <p:nvPr/>
         </p:nvSpPr>
